--- a/Slides/Mod08/MOD008-Mapping-SLAM.pptx
+++ b/Slides/Mod08/MOD008-Mapping-SLAM.pptx
@@ -5717,7 +5717,7 @@
         <p:spPr>
           <a:xfrm>
             <a:off x="365760" y="3017520"/>
-            <a:ext cx="8412480" cy="274320"/>
+            <a:ext cx="8412480" cy="951968"/>
           </a:xfrm>
           <a:prstGeom prst="rect">
             <a:avLst/>
@@ -5741,7 +5741,52 @@
                 <a:ea typeface="Arial" pitchFamily="34" charset="-122"/>
                 <a:cs typeface="Arial" pitchFamily="34" charset="-120"/>
               </a:rPr>
-              <a:t>Occupancy = 'Is this cell free?' Feature = 'Where are landmarks?' Often used together.</a:t>
+              <a:t>Occupancy = 'Is this cell free?’ </a:t>
+            </a:r>
+          </a:p>
+          <a:p>
+            <a:pPr marL="0" indent="0">
+              <a:buNone/>
+            </a:pPr>
+            <a:r>
+              <a:rPr lang="en-US" sz="1200" b="1" dirty="0">
+                <a:solidFill>
+                  <a:srgbClr val="1F2937"/>
+                </a:solidFill>
+                <a:latin typeface="Arial" pitchFamily="34" charset="0"/>
+                <a:ea typeface="Arial" pitchFamily="34" charset="-122"/>
+                <a:cs typeface="Arial" pitchFamily="34" charset="-120"/>
+              </a:rPr>
+              <a:t>Feature = 'Where are landmarks?’ </a:t>
+            </a:r>
+          </a:p>
+          <a:p>
+            <a:pPr marL="0" indent="0">
+              <a:buNone/>
+            </a:pPr>
+            <a:endParaRPr lang="en-US" sz="1200" b="1" dirty="0">
+              <a:solidFill>
+                <a:srgbClr val="1F2937"/>
+              </a:solidFill>
+              <a:latin typeface="Arial" pitchFamily="34" charset="0"/>
+              <a:ea typeface="Arial" pitchFamily="34" charset="-122"/>
+              <a:cs typeface="Arial" pitchFamily="34" charset="-120"/>
+            </a:endParaRPr>
+          </a:p>
+          <a:p>
+            <a:pPr marL="0" indent="0">
+              <a:buNone/>
+            </a:pPr>
+            <a:r>
+              <a:rPr lang="en-US" sz="1200" b="1" dirty="0">
+                <a:solidFill>
+                  <a:srgbClr val="1F2937"/>
+                </a:solidFill>
+                <a:latin typeface="Arial" pitchFamily="34" charset="0"/>
+                <a:ea typeface="Arial" pitchFamily="34" charset="-122"/>
+                <a:cs typeface="Arial" pitchFamily="34" charset="-120"/>
+              </a:rPr>
+              <a:t>Often used together.</a:t>
             </a:r>
             <a:endParaRPr lang="en-US" sz="1200" dirty="0"/>
           </a:p>
@@ -5886,8 +5931,8 @@
         </p:nvSpPr>
         <p:spPr>
           <a:xfrm>
-            <a:off x="365760" y="685800"/>
-            <a:ext cx="8412480" cy="274320"/>
+            <a:off x="365760" y="685799"/>
+            <a:ext cx="8412480" cy="692745"/>
           </a:xfrm>
           <a:prstGeom prst="rect">
             <a:avLst/>
@@ -5911,7 +5956,39 @@
                 <a:ea typeface="Arial" pitchFamily="34" charset="-122"/>
                 <a:cs typeface="Arial" pitchFamily="34" charset="-120"/>
               </a:rPr>
-              <a:t>Represent environment as a GRAPH: nodes = places, edges = connections between them.</a:t>
+              <a:t>Represent environment as a GRAPH: </a:t>
+            </a:r>
+          </a:p>
+          <a:p>
+            <a:pPr marL="0" indent="0">
+              <a:buNone/>
+            </a:pPr>
+            <a:r>
+              <a:rPr lang="en-US" sz="1300" b="1" dirty="0">
+                <a:solidFill>
+                  <a:srgbClr val="8B5CF6"/>
+                </a:solidFill>
+                <a:latin typeface="Arial" pitchFamily="34" charset="0"/>
+                <a:ea typeface="Arial" pitchFamily="34" charset="-122"/>
+                <a:cs typeface="Arial" pitchFamily="34" charset="-120"/>
+              </a:rPr>
+              <a:t>nodes = places, </a:t>
+            </a:r>
+          </a:p>
+          <a:p>
+            <a:pPr marL="0" indent="0">
+              <a:buNone/>
+            </a:pPr>
+            <a:r>
+              <a:rPr lang="en-US" sz="1300" b="1" dirty="0">
+                <a:solidFill>
+                  <a:srgbClr val="8B5CF6"/>
+                </a:solidFill>
+                <a:latin typeface="Arial" pitchFamily="34" charset="0"/>
+                <a:ea typeface="Arial" pitchFamily="34" charset="-122"/>
+                <a:cs typeface="Arial" pitchFamily="34" charset="-120"/>
+              </a:rPr>
+              <a:t>edges = connections between them.</a:t>
             </a:r>
             <a:endParaRPr lang="en-US" sz="1300" dirty="0"/>
           </a:p>
@@ -5919,20 +5996,20 @@
       </p:sp>
       <p:sp>
         <p:nvSpPr>
-          <p:cNvPr id="6" name="Shape 4"/>
-          <p:cNvSpPr/>
-          <p:nvPr/>
-        </p:nvSpPr>
-        <p:spPr>
-          <a:xfrm>
-            <a:off x="731520" y="1463040"/>
-            <a:ext cx="1463040" cy="548640"/>
-          </a:xfrm>
-          <a:prstGeom prst="ellipse">
+          <p:cNvPr id="18" name="Shape 16"/>
+          <p:cNvSpPr/>
+          <p:nvPr/>
+        </p:nvSpPr>
+        <p:spPr>
+          <a:xfrm>
+            <a:off x="274320" y="3554817"/>
+            <a:ext cx="4114800" cy="1097280"/>
+          </a:xfrm>
+          <a:prstGeom prst="rect">
             <a:avLst/>
           </a:prstGeom>
           <a:solidFill>
-            <a:srgbClr val="8B5CF6"/>
+            <a:srgbClr val="FFFFFF"/>
           </a:solidFill>
           <a:ln/>
           <a:effectLst>
@@ -5946,14 +6023,34 @@
       </p:sp>
       <p:sp>
         <p:nvSpPr>
-          <p:cNvPr id="7" name="Text 5"/>
-          <p:cNvSpPr/>
-          <p:nvPr/>
-        </p:nvSpPr>
-        <p:spPr>
-          <a:xfrm>
-            <a:off x="731520" y="1481328"/>
-            <a:ext cx="1463040" cy="512064"/>
+          <p:cNvPr id="19" name="Shape 17"/>
+          <p:cNvSpPr/>
+          <p:nvPr/>
+        </p:nvSpPr>
+        <p:spPr>
+          <a:xfrm>
+            <a:off x="274320" y="3554817"/>
+            <a:ext cx="54864" cy="1097280"/>
+          </a:xfrm>
+          <a:prstGeom prst="rect">
+            <a:avLst/>
+          </a:prstGeom>
+          <a:solidFill>
+            <a:srgbClr val="10B981"/>
+          </a:solidFill>
+          <a:ln/>
+        </p:spPr>
+      </p:sp>
+      <p:sp>
+        <p:nvSpPr>
+          <p:cNvPr id="20" name="Text 18"/>
+          <p:cNvSpPr/>
+          <p:nvPr/>
+        </p:nvSpPr>
+        <p:spPr>
+          <a:xfrm>
+            <a:off x="438912" y="3609681"/>
+            <a:ext cx="3840480" cy="274320"/>
           </a:xfrm>
           <a:prstGeom prst="rect">
             <a:avLst/>
@@ -5962,22 +6059,22 @@
           <a:ln/>
         </p:spPr>
         <p:txBody>
-          <a:bodyPr wrap="square" rtlCol="0" anchor="ctr"/>
+          <a:bodyPr wrap="square" lIns="0" tIns="0" rIns="0" bIns="0" rtlCol="0" anchor="ctr"/>
           <a:lstStyle/>
           <a:p>
-            <a:pPr marL="0" indent="0" algn="ctr">
+            <a:pPr marL="0" indent="0">
               <a:buNone/>
             </a:pPr>
             <a:r>
               <a:rPr lang="en-US" sz="1200" b="1" dirty="0">
                 <a:solidFill>
-                  <a:srgbClr val="FFFFFF"/>
-                </a:solidFill>
-                <a:latin typeface="Arial" pitchFamily="34" charset="0"/>
-                <a:ea typeface="Arial" pitchFamily="34" charset="-122"/>
-                <a:cs typeface="Arial" pitchFamily="34" charset="-120"/>
-              </a:rPr>
-              <a:t>Pharmacy</a:t>
+                  <a:srgbClr val="1F2937"/>
+                </a:solidFill>
+                <a:latin typeface="Arial" pitchFamily="34" charset="0"/>
+                <a:ea typeface="Arial" pitchFamily="34" charset="-122"/>
+                <a:cs typeface="Arial" pitchFamily="34" charset="-120"/>
+              </a:rPr>
+              <a:t>Advantages:</a:t>
             </a:r>
             <a:endParaRPr lang="en-US" sz="1200" dirty="0"/>
           </a:p>
@@ -5985,20 +6082,96 @@
       </p:sp>
       <p:sp>
         <p:nvSpPr>
-          <p:cNvPr id="8" name="Shape 6"/>
-          <p:cNvSpPr/>
-          <p:nvPr/>
-        </p:nvSpPr>
-        <p:spPr>
-          <a:xfrm>
-            <a:off x="2743200" y="1280160"/>
-            <a:ext cx="1463040" cy="548640"/>
-          </a:xfrm>
-          <a:prstGeom prst="ellipse">
+          <p:cNvPr id="21" name="Text 19"/>
+          <p:cNvSpPr/>
+          <p:nvPr/>
+        </p:nvSpPr>
+        <p:spPr>
+          <a:xfrm>
+            <a:off x="438912" y="3902289"/>
+            <a:ext cx="3840480" cy="685800"/>
+          </a:xfrm>
+          <a:prstGeom prst="rect">
+            <a:avLst/>
+          </a:prstGeom>
+          <a:noFill/>
+          <a:ln/>
+        </p:spPr>
+        <p:txBody>
+          <a:bodyPr wrap="square" rtlCol="0" anchor="t"/>
+          <a:lstStyle/>
+          <a:p>
+            <a:pPr marL="342900" indent="-342900">
+              <a:buSzPct val="100000"/>
+              <a:buChar char="•"/>
+            </a:pPr>
+            <a:r>
+              <a:rPr lang="en-US" sz="1200" dirty="0">
+                <a:solidFill>
+                  <a:srgbClr val="6B7280"/>
+                </a:solidFill>
+                <a:latin typeface="Arial" pitchFamily="34" charset="0"/>
+                <a:ea typeface="Arial" pitchFamily="34" charset="-122"/>
+                <a:cs typeface="Arial" pitchFamily="34" charset="-120"/>
+              </a:rPr>
+              <a:t>Very compact, natural for high-level planning</a:t>
+            </a:r>
+            <a:endParaRPr lang="en-US" sz="1200" dirty="0"/>
+          </a:p>
+          <a:p>
+            <a:pPr marL="342900" indent="-342900">
+              <a:buSzPct val="100000"/>
+              <a:buChar char="•"/>
+            </a:pPr>
+            <a:r>
+              <a:rPr lang="en-US" sz="1200" dirty="0">
+                <a:solidFill>
+                  <a:srgbClr val="6B7280"/>
+                </a:solidFill>
+                <a:latin typeface="Arial" pitchFamily="34" charset="0"/>
+                <a:ea typeface="Arial" pitchFamily="34" charset="-122"/>
+                <a:cs typeface="Arial" pitchFamily="34" charset="-120"/>
+              </a:rPr>
+              <a:t>'Go to pharmacy then elevator'</a:t>
+            </a:r>
+            <a:endParaRPr lang="en-US" sz="1200" dirty="0"/>
+          </a:p>
+          <a:p>
+            <a:pPr marL="342900" indent="-342900">
+              <a:buSzPct val="100000"/>
+              <a:buChar char="•"/>
+            </a:pPr>
+            <a:r>
+              <a:rPr lang="en-US" sz="1200" dirty="0">
+                <a:solidFill>
+                  <a:srgbClr val="6B7280"/>
+                </a:solidFill>
+                <a:latin typeface="Arial" pitchFamily="34" charset="0"/>
+                <a:ea typeface="Arial" pitchFamily="34" charset="-122"/>
+                <a:cs typeface="Arial" pitchFamily="34" charset="-120"/>
+              </a:rPr>
+              <a:t>Scales to entire buildings, multi-floor</a:t>
+            </a:r>
+            <a:endParaRPr lang="en-US" sz="1200" dirty="0"/>
+          </a:p>
+        </p:txBody>
+      </p:sp>
+      <p:sp>
+        <p:nvSpPr>
+          <p:cNvPr id="22" name="Shape 20"/>
+          <p:cNvSpPr/>
+          <p:nvPr/>
+        </p:nvSpPr>
+        <p:spPr>
+          <a:xfrm>
+            <a:off x="4663440" y="3554817"/>
+            <a:ext cx="4206240" cy="1097280"/>
+          </a:xfrm>
+          <a:prstGeom prst="rect">
             <a:avLst/>
           </a:prstGeom>
           <a:solidFill>
-            <a:srgbClr val="8B5CF6"/>
+            <a:srgbClr val="FFFFFF"/>
           </a:solidFill>
           <a:ln/>
           <a:effectLst>
@@ -6012,364 +6185,34 @@
       </p:sp>
       <p:sp>
         <p:nvSpPr>
-          <p:cNvPr id="9" name="Text 7"/>
-          <p:cNvSpPr/>
-          <p:nvPr/>
-        </p:nvSpPr>
-        <p:spPr>
-          <a:xfrm>
-            <a:off x="2743200" y="1298448"/>
-            <a:ext cx="1463040" cy="512064"/>
-          </a:xfrm>
-          <a:prstGeom prst="rect">
-            <a:avLst/>
-          </a:prstGeom>
-          <a:noFill/>
-          <a:ln/>
-        </p:spPr>
-        <p:txBody>
-          <a:bodyPr wrap="square" rtlCol="0" anchor="ctr"/>
-          <a:lstStyle/>
-          <a:p>
-            <a:pPr marL="0" indent="0" algn="ctr">
-              <a:buNone/>
-            </a:pPr>
-            <a:r>
-              <a:rPr lang="en-US" sz="1200" b="1" dirty="0">
-                <a:solidFill>
-                  <a:srgbClr val="FFFFFF"/>
-                </a:solidFill>
-                <a:latin typeface="Arial" pitchFamily="34" charset="0"/>
-                <a:ea typeface="Arial" pitchFamily="34" charset="-122"/>
-                <a:cs typeface="Arial" pitchFamily="34" charset="-120"/>
-              </a:rPr>
-              <a:t>Corridor A</a:t>
-            </a:r>
-            <a:endParaRPr lang="en-US" sz="1200" dirty="0"/>
-          </a:p>
-        </p:txBody>
-      </p:sp>
-      <p:sp>
-        <p:nvSpPr>
-          <p:cNvPr id="10" name="Shape 8"/>
-          <p:cNvSpPr/>
-          <p:nvPr/>
-        </p:nvSpPr>
-        <p:spPr>
-          <a:xfrm>
-            <a:off x="5029200" y="1463040"/>
-            <a:ext cx="1463040" cy="548640"/>
-          </a:xfrm>
-          <a:prstGeom prst="ellipse">
+          <p:cNvPr id="23" name="Shape 21"/>
+          <p:cNvSpPr/>
+          <p:nvPr/>
+        </p:nvSpPr>
+        <p:spPr>
+          <a:xfrm>
+            <a:off x="4663440" y="3554817"/>
+            <a:ext cx="54864" cy="1097280"/>
+          </a:xfrm>
+          <a:prstGeom prst="rect">
             <a:avLst/>
           </a:prstGeom>
           <a:solidFill>
-            <a:srgbClr val="8B5CF6"/>
+            <a:srgbClr val="EF4444"/>
           </a:solidFill>
           <a:ln/>
-          <a:effectLst>
-            <a:outerShdw blurRad="50800" dist="25400" dir="8100000" algn="bl" rotWithShape="0">
-              <a:srgbClr val="000000">
-                <a:alpha val="12000"/>
-              </a:srgbClr>
-            </a:outerShdw>
-          </a:effectLst>
-        </p:spPr>
-      </p:sp>
-      <p:sp>
-        <p:nvSpPr>
-          <p:cNvPr id="11" name="Text 9"/>
-          <p:cNvSpPr/>
-          <p:nvPr/>
-        </p:nvSpPr>
-        <p:spPr>
-          <a:xfrm>
-            <a:off x="5029200" y="1481328"/>
-            <a:ext cx="1463040" cy="512064"/>
-          </a:xfrm>
-          <a:prstGeom prst="rect">
-            <a:avLst/>
-          </a:prstGeom>
-          <a:noFill/>
-          <a:ln/>
-        </p:spPr>
-        <p:txBody>
-          <a:bodyPr wrap="square" rtlCol="0" anchor="ctr"/>
-          <a:lstStyle/>
-          <a:p>
-            <a:pPr marL="0" indent="0" algn="ctr">
-              <a:buNone/>
-            </a:pPr>
-            <a:r>
-              <a:rPr lang="en-US" sz="1200" b="1" dirty="0">
-                <a:solidFill>
-                  <a:srgbClr val="FFFFFF"/>
-                </a:solidFill>
-                <a:latin typeface="Arial" pitchFamily="34" charset="0"/>
-                <a:ea typeface="Arial" pitchFamily="34" charset="-122"/>
-                <a:cs typeface="Arial" pitchFamily="34" charset="-120"/>
-              </a:rPr>
-              <a:t>Elevator</a:t>
-            </a:r>
-            <a:endParaRPr lang="en-US" sz="1200" dirty="0"/>
-          </a:p>
-        </p:txBody>
-      </p:sp>
-      <p:sp>
-        <p:nvSpPr>
-          <p:cNvPr id="12" name="Shape 10"/>
-          <p:cNvSpPr/>
-          <p:nvPr/>
-        </p:nvSpPr>
-        <p:spPr>
-          <a:xfrm>
-            <a:off x="2743200" y="2560320"/>
-            <a:ext cx="1463040" cy="548640"/>
-          </a:xfrm>
-          <a:prstGeom prst="ellipse">
-            <a:avLst/>
-          </a:prstGeom>
-          <a:solidFill>
-            <a:srgbClr val="8B5CF6"/>
-          </a:solidFill>
-          <a:ln/>
-          <a:effectLst>
-            <a:outerShdw blurRad="50800" dist="25400" dir="8100000" algn="bl" rotWithShape="0">
-              <a:srgbClr val="000000">
-                <a:alpha val="12000"/>
-              </a:srgbClr>
-            </a:outerShdw>
-          </a:effectLst>
-        </p:spPr>
-      </p:sp>
-      <p:sp>
-        <p:nvSpPr>
-          <p:cNvPr id="13" name="Text 11"/>
-          <p:cNvSpPr/>
-          <p:nvPr/>
-        </p:nvSpPr>
-        <p:spPr>
-          <a:xfrm>
-            <a:off x="2743200" y="2578608"/>
-            <a:ext cx="1463040" cy="512064"/>
-          </a:xfrm>
-          <a:prstGeom prst="rect">
-            <a:avLst/>
-          </a:prstGeom>
-          <a:noFill/>
-          <a:ln/>
-        </p:spPr>
-        <p:txBody>
-          <a:bodyPr wrap="square" rtlCol="0" anchor="ctr"/>
-          <a:lstStyle/>
-          <a:p>
-            <a:pPr marL="0" indent="0" algn="ctr">
-              <a:buNone/>
-            </a:pPr>
-            <a:r>
-              <a:rPr lang="en-US" sz="1200" b="1" dirty="0">
-                <a:solidFill>
-                  <a:srgbClr val="FFFFFF"/>
-                </a:solidFill>
-                <a:latin typeface="Arial" pitchFamily="34" charset="0"/>
-                <a:ea typeface="Arial" pitchFamily="34" charset="-122"/>
-                <a:cs typeface="Arial" pitchFamily="34" charset="-120"/>
-              </a:rPr>
-              <a:t>Corridor B</a:t>
-            </a:r>
-            <a:endParaRPr lang="en-US" sz="1200" dirty="0"/>
-          </a:p>
-        </p:txBody>
-      </p:sp>
-      <p:sp>
-        <p:nvSpPr>
-          <p:cNvPr id="14" name="Shape 12"/>
-          <p:cNvSpPr/>
-          <p:nvPr/>
-        </p:nvSpPr>
-        <p:spPr>
-          <a:xfrm>
-            <a:off x="5029200" y="2743200"/>
-            <a:ext cx="1463040" cy="548640"/>
-          </a:xfrm>
-          <a:prstGeom prst="ellipse">
-            <a:avLst/>
-          </a:prstGeom>
-          <a:solidFill>
-            <a:srgbClr val="8B5CF6"/>
-          </a:solidFill>
-          <a:ln/>
-          <a:effectLst>
-            <a:outerShdw blurRad="50800" dist="25400" dir="8100000" algn="bl" rotWithShape="0">
-              <a:srgbClr val="000000">
-                <a:alpha val="12000"/>
-              </a:srgbClr>
-            </a:outerShdw>
-          </a:effectLst>
-        </p:spPr>
-      </p:sp>
-      <p:sp>
-        <p:nvSpPr>
-          <p:cNvPr id="15" name="Text 13"/>
-          <p:cNvSpPr/>
-          <p:nvPr/>
-        </p:nvSpPr>
-        <p:spPr>
-          <a:xfrm>
-            <a:off x="5029200" y="2761488"/>
-            <a:ext cx="1463040" cy="512064"/>
-          </a:xfrm>
-          <a:prstGeom prst="rect">
-            <a:avLst/>
-          </a:prstGeom>
-          <a:noFill/>
-          <a:ln/>
-        </p:spPr>
-        <p:txBody>
-          <a:bodyPr wrap="square" rtlCol="0" anchor="ctr"/>
-          <a:lstStyle/>
-          <a:p>
-            <a:pPr marL="0" indent="0" algn="ctr">
-              <a:buNone/>
-            </a:pPr>
-            <a:r>
-              <a:rPr lang="en-US" sz="1200" b="1" dirty="0">
-                <a:solidFill>
-                  <a:srgbClr val="FFFFFF"/>
-                </a:solidFill>
-                <a:latin typeface="Arial" pitchFamily="34" charset="0"/>
-                <a:ea typeface="Arial" pitchFamily="34" charset="-122"/>
-                <a:cs typeface="Arial" pitchFamily="34" charset="-120"/>
-              </a:rPr>
-              <a:t>Ward B</a:t>
-            </a:r>
-            <a:endParaRPr lang="en-US" sz="1200" dirty="0"/>
-          </a:p>
-        </p:txBody>
-      </p:sp>
-      <p:sp>
-        <p:nvSpPr>
-          <p:cNvPr id="16" name="Shape 14"/>
-          <p:cNvSpPr/>
-          <p:nvPr/>
-        </p:nvSpPr>
-        <p:spPr>
-          <a:xfrm>
-            <a:off x="731520" y="2743200"/>
-            <a:ext cx="1463040" cy="548640"/>
-          </a:xfrm>
-          <a:prstGeom prst="ellipse">
-            <a:avLst/>
-          </a:prstGeom>
-          <a:solidFill>
-            <a:srgbClr val="8B5CF6"/>
-          </a:solidFill>
-          <a:ln/>
-          <a:effectLst>
-            <a:outerShdw blurRad="50800" dist="25400" dir="8100000" algn="bl" rotWithShape="0">
-              <a:srgbClr val="000000">
-                <a:alpha val="12000"/>
-              </a:srgbClr>
-            </a:outerShdw>
-          </a:effectLst>
-        </p:spPr>
-      </p:sp>
-      <p:sp>
-        <p:nvSpPr>
-          <p:cNvPr id="17" name="Text 15"/>
-          <p:cNvSpPr/>
-          <p:nvPr/>
-        </p:nvSpPr>
-        <p:spPr>
-          <a:xfrm>
-            <a:off x="731520" y="2761488"/>
-            <a:ext cx="1463040" cy="512064"/>
-          </a:xfrm>
-          <a:prstGeom prst="rect">
-            <a:avLst/>
-          </a:prstGeom>
-          <a:noFill/>
-          <a:ln/>
-        </p:spPr>
-        <p:txBody>
-          <a:bodyPr wrap="square" rtlCol="0" anchor="ctr"/>
-          <a:lstStyle/>
-          <a:p>
-            <a:pPr marL="0" indent="0" algn="ctr">
-              <a:buNone/>
-            </a:pPr>
-            <a:r>
-              <a:rPr lang="en-US" sz="1200" b="1" dirty="0">
-                <a:solidFill>
-                  <a:srgbClr val="FFFFFF"/>
-                </a:solidFill>
-                <a:latin typeface="Arial" pitchFamily="34" charset="0"/>
-                <a:ea typeface="Arial" pitchFamily="34" charset="-122"/>
-                <a:cs typeface="Arial" pitchFamily="34" charset="-120"/>
-              </a:rPr>
-              <a:t>Lab</a:t>
-            </a:r>
-            <a:endParaRPr lang="en-US" sz="1200" dirty="0"/>
-          </a:p>
-        </p:txBody>
-      </p:sp>
-      <p:sp>
-        <p:nvSpPr>
-          <p:cNvPr id="18" name="Shape 16"/>
-          <p:cNvSpPr/>
-          <p:nvPr/>
-        </p:nvSpPr>
-        <p:spPr>
-          <a:xfrm>
-            <a:off x="274320" y="3554817"/>
-            <a:ext cx="4114800" cy="1097280"/>
-          </a:xfrm>
-          <a:prstGeom prst="rect">
-            <a:avLst/>
-          </a:prstGeom>
-          <a:solidFill>
-            <a:srgbClr val="FFFFFF"/>
-          </a:solidFill>
-          <a:ln/>
-          <a:effectLst>
-            <a:outerShdw blurRad="50800" dist="25400" dir="8100000" algn="bl" rotWithShape="0">
-              <a:srgbClr val="000000">
-                <a:alpha val="12000"/>
-              </a:srgbClr>
-            </a:outerShdw>
-          </a:effectLst>
-        </p:spPr>
-      </p:sp>
-      <p:sp>
-        <p:nvSpPr>
-          <p:cNvPr id="19" name="Shape 17"/>
-          <p:cNvSpPr/>
-          <p:nvPr/>
-        </p:nvSpPr>
-        <p:spPr>
-          <a:xfrm>
-            <a:off x="274320" y="3554817"/>
-            <a:ext cx="54864" cy="1097280"/>
-          </a:xfrm>
-          <a:prstGeom prst="rect">
-            <a:avLst/>
-          </a:prstGeom>
-          <a:solidFill>
-            <a:srgbClr val="10B981"/>
-          </a:solidFill>
-          <a:ln/>
-        </p:spPr>
-      </p:sp>
-      <p:sp>
-        <p:nvSpPr>
-          <p:cNvPr id="20" name="Text 18"/>
-          <p:cNvSpPr/>
-          <p:nvPr/>
-        </p:nvSpPr>
-        <p:spPr>
-          <a:xfrm>
-            <a:off x="438912" y="3609681"/>
-            <a:ext cx="3840480" cy="274320"/>
+        </p:spPr>
+      </p:sp>
+      <p:sp>
+        <p:nvSpPr>
+          <p:cNvPr id="24" name="Text 22"/>
+          <p:cNvSpPr/>
+          <p:nvPr/>
+        </p:nvSpPr>
+        <p:spPr>
+          <a:xfrm>
+            <a:off x="4828032" y="3609681"/>
+            <a:ext cx="3931920" cy="274320"/>
           </a:xfrm>
           <a:prstGeom prst="rect">
             <a:avLst/>
@@ -6393,7 +6236,7 @@
                 <a:ea typeface="Arial" pitchFamily="34" charset="-122"/>
                 <a:cs typeface="Arial" pitchFamily="34" charset="-120"/>
               </a:rPr>
-              <a:t>Advantages:</a:t>
+              <a:t>Limitations:</a:t>
             </a:r>
             <a:endParaRPr lang="en-US" sz="1200" dirty="0"/>
           </a:p>
@@ -6401,14 +6244,14 @@
       </p:sp>
       <p:sp>
         <p:nvSpPr>
-          <p:cNvPr id="21" name="Text 19"/>
-          <p:cNvSpPr/>
-          <p:nvPr/>
-        </p:nvSpPr>
-        <p:spPr>
-          <a:xfrm>
-            <a:off x="438912" y="3902289"/>
-            <a:ext cx="3840480" cy="685800"/>
+          <p:cNvPr id="25" name="Text 23"/>
+          <p:cNvSpPr/>
+          <p:nvPr/>
+        </p:nvSpPr>
+        <p:spPr>
+          <a:xfrm>
+            <a:off x="4828032" y="3902289"/>
+            <a:ext cx="3931920" cy="685800"/>
           </a:xfrm>
           <a:prstGeom prst="rect">
             <a:avLst/>
@@ -6433,7 +6276,7 @@
                 <a:ea typeface="Arial" pitchFamily="34" charset="-122"/>
                 <a:cs typeface="Arial" pitchFamily="34" charset="-120"/>
               </a:rPr>
-              <a:t>Very compact, natural for high-level planning</a:t>
+              <a:t>No metric detail (exact positions)</a:t>
             </a:r>
             <a:endParaRPr lang="en-US" sz="1200" dirty="0"/>
           </a:p>
@@ -6451,389 +6294,644 @@
                 <a:ea typeface="Arial" pitchFamily="34" charset="-122"/>
                 <a:cs typeface="Arial" pitchFamily="34" charset="-120"/>
               </a:rPr>
-              <a:t>'Go to pharmacy then elevator'</a:t>
+              <a:t>Can't do fine obstacle avoidance</a:t>
             </a:r>
             <a:endParaRPr lang="en-US" sz="1200" dirty="0"/>
           </a:p>
-          <a:p>
-            <a:pPr marL="342900" indent="-342900">
-              <a:buSzPct val="100000"/>
-              <a:buChar char="•"/>
-            </a:pPr>
-            <a:r>
-              <a:rPr lang="en-US" sz="1200" dirty="0">
-                <a:solidFill>
-                  <a:srgbClr val="6B7280"/>
-                </a:solidFill>
-                <a:latin typeface="Arial" pitchFamily="34" charset="0"/>
-                <a:ea typeface="Arial" pitchFamily="34" charset="-122"/>
-                <a:cs typeface="Arial" pitchFamily="34" charset="-120"/>
-              </a:rPr>
-              <a:t>Scales to entire buildings, multi-floor</a:t>
-            </a:r>
-            <a:endParaRPr lang="en-US" sz="1200" dirty="0"/>
-          </a:p>
         </p:txBody>
       </p:sp>
-      <p:sp>
-        <p:nvSpPr>
-          <p:cNvPr id="22" name="Shape 20"/>
-          <p:cNvSpPr/>
-          <p:nvPr/>
-        </p:nvSpPr>
-        <p:spPr>
-          <a:xfrm>
-            <a:off x="4663440" y="3554817"/>
-            <a:ext cx="4206240" cy="1097280"/>
-          </a:xfrm>
-          <a:prstGeom prst="rect">
-            <a:avLst/>
-          </a:prstGeom>
-          <a:solidFill>
-            <a:srgbClr val="FFFFFF"/>
-          </a:solidFill>
-          <a:ln/>
-          <a:effectLst>
-            <a:outerShdw blurRad="50800" dist="25400" dir="8100000" algn="bl" rotWithShape="0">
-              <a:srgbClr val="000000">
-                <a:alpha val="12000"/>
-              </a:srgbClr>
-            </a:outerShdw>
-          </a:effectLst>
-        </p:spPr>
-      </p:sp>
-      <p:sp>
-        <p:nvSpPr>
-          <p:cNvPr id="23" name="Shape 21"/>
-          <p:cNvSpPr/>
-          <p:nvPr/>
-        </p:nvSpPr>
-        <p:spPr>
-          <a:xfrm>
-            <a:off x="4663440" y="3554817"/>
-            <a:ext cx="54864" cy="1097280"/>
-          </a:xfrm>
-          <a:prstGeom prst="rect">
-            <a:avLst/>
-          </a:prstGeom>
-          <a:solidFill>
-            <a:srgbClr val="EF4444"/>
-          </a:solidFill>
-          <a:ln/>
-        </p:spPr>
-      </p:sp>
-      <p:sp>
-        <p:nvSpPr>
-          <p:cNvPr id="24" name="Text 22"/>
-          <p:cNvSpPr/>
-          <p:nvPr/>
-        </p:nvSpPr>
-        <p:spPr>
-          <a:xfrm>
-            <a:off x="4828032" y="3609681"/>
-            <a:ext cx="3931920" cy="274320"/>
-          </a:xfrm>
-          <a:prstGeom prst="rect">
-            <a:avLst/>
-          </a:prstGeom>
-          <a:noFill/>
-          <a:ln/>
-        </p:spPr>
-        <p:txBody>
-          <a:bodyPr wrap="square" lIns="0" tIns="0" rIns="0" bIns="0" rtlCol="0" anchor="ctr"/>
-          <a:lstStyle/>
-          <a:p>
-            <a:pPr marL="0" indent="0">
-              <a:buNone/>
-            </a:pPr>
-            <a:r>
-              <a:rPr lang="en-US" sz="1200" b="1" dirty="0">
-                <a:solidFill>
-                  <a:srgbClr val="1F2937"/>
-                </a:solidFill>
-                <a:latin typeface="Arial" pitchFamily="34" charset="0"/>
-                <a:ea typeface="Arial" pitchFamily="34" charset="-122"/>
-                <a:cs typeface="Arial" pitchFamily="34" charset="-120"/>
-              </a:rPr>
-              <a:t>Limitations:</a:t>
-            </a:r>
-            <a:endParaRPr lang="en-US" sz="1200" dirty="0"/>
-          </a:p>
-        </p:txBody>
-      </p:sp>
-      <p:sp>
-        <p:nvSpPr>
-          <p:cNvPr id="25" name="Text 23"/>
-          <p:cNvSpPr/>
-          <p:nvPr/>
-        </p:nvSpPr>
-        <p:spPr>
-          <a:xfrm>
-            <a:off x="4828032" y="3902289"/>
-            <a:ext cx="3931920" cy="685800"/>
-          </a:xfrm>
-          <a:prstGeom prst="rect">
-            <a:avLst/>
-          </a:prstGeom>
-          <a:noFill/>
-          <a:ln/>
-        </p:spPr>
-        <p:txBody>
-          <a:bodyPr wrap="square" rtlCol="0" anchor="t"/>
-          <a:lstStyle/>
-          <a:p>
-            <a:pPr marL="342900" indent="-342900">
-              <a:buSzPct val="100000"/>
-              <a:buChar char="•"/>
-            </a:pPr>
-            <a:r>
-              <a:rPr lang="en-US" sz="1200" dirty="0">
-                <a:solidFill>
-                  <a:srgbClr val="6B7280"/>
-                </a:solidFill>
-                <a:latin typeface="Arial" pitchFamily="34" charset="0"/>
-                <a:ea typeface="Arial" pitchFamily="34" charset="-122"/>
-                <a:cs typeface="Arial" pitchFamily="34" charset="-120"/>
-              </a:rPr>
-              <a:t>No metric detail (exact positions)</a:t>
-            </a:r>
-            <a:endParaRPr lang="en-US" sz="1200" dirty="0"/>
-          </a:p>
-          <a:p>
-            <a:pPr marL="342900" indent="-342900">
-              <a:buSzPct val="100000"/>
-              <a:buChar char="•"/>
-            </a:pPr>
-            <a:r>
-              <a:rPr lang="en-US" sz="1200" dirty="0">
-                <a:solidFill>
-                  <a:srgbClr val="6B7280"/>
-                </a:solidFill>
-                <a:latin typeface="Arial" pitchFamily="34" charset="0"/>
-                <a:ea typeface="Arial" pitchFamily="34" charset="-122"/>
-                <a:cs typeface="Arial" pitchFamily="34" charset="-120"/>
-              </a:rPr>
-              <a:t>Can't do fine obstacle avoidance</a:t>
-            </a:r>
-            <a:endParaRPr lang="en-US" sz="1200" dirty="0"/>
-          </a:p>
-        </p:txBody>
-      </p:sp>
-      <p:cxnSp>
-        <p:nvCxnSpPr>
-          <p:cNvPr id="27" name="Connector: Curved 26">
+      <p:grpSp>
+        <p:nvGrpSpPr>
+          <p:cNvPr id="28" name="Group 27">
             <a:extLst>
               <a:ext uri="{FF2B5EF4-FFF2-40B4-BE49-F238E27FC236}">
-                <a16:creationId xmlns:a16="http://schemas.microsoft.com/office/drawing/2014/main" id="{FF85CF94-2DC4-4DF8-883F-6781F7A2C9DD}"/>
+                <a16:creationId xmlns:a16="http://schemas.microsoft.com/office/drawing/2014/main" id="{D493ED0C-FD71-4450-92FD-A627B34375B0}"/>
               </a:ext>
             </a:extLst>
           </p:cNvPr>
-          <p:cNvCxnSpPr>
-            <a:stCxn id="7" idx="3"/>
-            <a:endCxn id="8" idx="2"/>
-          </p:cNvCxnSpPr>
-          <p:nvPr/>
-        </p:nvCxnSpPr>
-        <p:spPr>
-          <a:xfrm flipV="1">
-            <a:off x="2194560" y="1554480"/>
-            <a:ext cx="548640" cy="182880"/>
-          </a:xfrm>
-          <a:prstGeom prst="curvedConnector3">
-            <a:avLst/>
-          </a:prstGeom>
-          <a:ln>
-            <a:headEnd type="triangle"/>
-            <a:tailEnd type="triangle"/>
-          </a:ln>
-        </p:spPr>
-        <p:style>
-          <a:lnRef idx="1">
-            <a:schemeClr val="accent1"/>
-          </a:lnRef>
-          <a:fillRef idx="0">
-            <a:schemeClr val="accent1"/>
-          </a:fillRef>
-          <a:effectRef idx="0">
-            <a:schemeClr val="accent1"/>
-          </a:effectRef>
-          <a:fontRef idx="minor">
-            <a:schemeClr val="tx1"/>
-          </a:fontRef>
-        </p:style>
-      </p:cxnSp>
-      <p:cxnSp>
-        <p:nvCxnSpPr>
-          <p:cNvPr id="29" name="Connector: Curved 28">
-            <a:extLst>
-              <a:ext uri="{FF2B5EF4-FFF2-40B4-BE49-F238E27FC236}">
-                <a16:creationId xmlns:a16="http://schemas.microsoft.com/office/drawing/2014/main" id="{C543B711-F424-47ED-9F84-A4571F286F0B}"/>
-              </a:ext>
-            </a:extLst>
-          </p:cNvPr>
-          <p:cNvCxnSpPr>
-            <a:stCxn id="9" idx="3"/>
-            <a:endCxn id="10" idx="2"/>
-          </p:cNvCxnSpPr>
-          <p:nvPr/>
-        </p:nvCxnSpPr>
-        <p:spPr>
-          <a:xfrm>
-            <a:off x="4206240" y="1554480"/>
-            <a:ext cx="822960" cy="182880"/>
-          </a:xfrm>
-          <a:prstGeom prst="curvedConnector3">
-            <a:avLst/>
-          </a:prstGeom>
-          <a:ln>
-            <a:headEnd type="triangle"/>
-            <a:tailEnd type="triangle"/>
-          </a:ln>
-        </p:spPr>
-        <p:style>
-          <a:lnRef idx="1">
-            <a:schemeClr val="accent1"/>
-          </a:lnRef>
-          <a:fillRef idx="0">
-            <a:schemeClr val="accent1"/>
-          </a:fillRef>
-          <a:effectRef idx="0">
-            <a:schemeClr val="accent1"/>
-          </a:effectRef>
-          <a:fontRef idx="minor">
-            <a:schemeClr val="tx1"/>
-          </a:fontRef>
-        </p:style>
-      </p:cxnSp>
-      <p:cxnSp>
-        <p:nvCxnSpPr>
-          <p:cNvPr id="31" name="Connector: Curved 30">
-            <a:extLst>
-              <a:ext uri="{FF2B5EF4-FFF2-40B4-BE49-F238E27FC236}">
-                <a16:creationId xmlns:a16="http://schemas.microsoft.com/office/drawing/2014/main" id="{37BF6ED7-B77C-4308-912D-C7A307F106A9}"/>
-              </a:ext>
-            </a:extLst>
-          </p:cNvPr>
-          <p:cNvCxnSpPr>
-            <a:stCxn id="10" idx="3"/>
-            <a:endCxn id="12" idx="0"/>
-          </p:cNvCxnSpPr>
-          <p:nvPr/>
-        </p:nvCxnSpPr>
-        <p:spPr>
-          <a:xfrm rot="5400000">
-            <a:off x="4044596" y="1361459"/>
-            <a:ext cx="628986" cy="1768737"/>
-          </a:xfrm>
-          <a:prstGeom prst="curvedConnector3">
-            <a:avLst/>
-          </a:prstGeom>
-          <a:ln>
-            <a:headEnd type="triangle"/>
-            <a:tailEnd type="triangle"/>
-          </a:ln>
-        </p:spPr>
-        <p:style>
-          <a:lnRef idx="1">
-            <a:schemeClr val="accent1"/>
-          </a:lnRef>
-          <a:fillRef idx="0">
-            <a:schemeClr val="accent1"/>
-          </a:fillRef>
-          <a:effectRef idx="0">
-            <a:schemeClr val="accent1"/>
-          </a:effectRef>
-          <a:fontRef idx="minor">
-            <a:schemeClr val="tx1"/>
-          </a:fontRef>
-        </p:style>
-      </p:cxnSp>
-      <p:cxnSp>
-        <p:nvCxnSpPr>
-          <p:cNvPr id="33" name="Connector: Curved 32">
-            <a:extLst>
-              <a:ext uri="{FF2B5EF4-FFF2-40B4-BE49-F238E27FC236}">
-                <a16:creationId xmlns:a16="http://schemas.microsoft.com/office/drawing/2014/main" id="{17AC40CD-0A85-4E07-8326-1EECA23D0B1B}"/>
-              </a:ext>
-            </a:extLst>
-          </p:cNvPr>
-          <p:cNvCxnSpPr>
-            <a:stCxn id="17" idx="3"/>
-            <a:endCxn id="12" idx="2"/>
-          </p:cNvCxnSpPr>
-          <p:nvPr/>
-        </p:nvCxnSpPr>
-        <p:spPr>
-          <a:xfrm flipV="1">
-            <a:off x="2194560" y="2834640"/>
-            <a:ext cx="548640" cy="182880"/>
-          </a:xfrm>
-          <a:prstGeom prst="curvedConnector3">
-            <a:avLst/>
-          </a:prstGeom>
-          <a:ln>
-            <a:headEnd type="triangle"/>
-            <a:tailEnd type="triangle"/>
-          </a:ln>
-        </p:spPr>
-        <p:style>
-          <a:lnRef idx="1">
-            <a:schemeClr val="accent1"/>
-          </a:lnRef>
-          <a:fillRef idx="0">
-            <a:schemeClr val="accent1"/>
-          </a:fillRef>
-          <a:effectRef idx="0">
-            <a:schemeClr val="accent1"/>
-          </a:effectRef>
-          <a:fontRef idx="minor">
-            <a:schemeClr val="tx1"/>
-          </a:fontRef>
-        </p:style>
-      </p:cxnSp>
-      <p:cxnSp>
-        <p:nvCxnSpPr>
-          <p:cNvPr id="35" name="Connector: Curved 34">
-            <a:extLst>
-              <a:ext uri="{FF2B5EF4-FFF2-40B4-BE49-F238E27FC236}">
-                <a16:creationId xmlns:a16="http://schemas.microsoft.com/office/drawing/2014/main" id="{A4F0FB54-9BF0-40CC-A920-17EB00204385}"/>
-              </a:ext>
-            </a:extLst>
-          </p:cNvPr>
-          <p:cNvCxnSpPr>
-            <a:stCxn id="13" idx="3"/>
-            <a:endCxn id="15" idx="1"/>
-          </p:cNvCxnSpPr>
-          <p:nvPr/>
-        </p:nvCxnSpPr>
-        <p:spPr>
-          <a:xfrm>
-            <a:off x="4206240" y="2834640"/>
-            <a:ext cx="822960" cy="182880"/>
-          </a:xfrm>
-          <a:prstGeom prst="curvedConnector3">
-            <a:avLst/>
-          </a:prstGeom>
-          <a:ln>
-            <a:headEnd type="triangle"/>
-            <a:tailEnd type="triangle"/>
-          </a:ln>
-        </p:spPr>
-        <p:style>
-          <a:lnRef idx="1">
-            <a:schemeClr val="accent1"/>
-          </a:lnRef>
-          <a:fillRef idx="0">
-            <a:schemeClr val="accent1"/>
-          </a:fillRef>
-          <a:effectRef idx="0">
-            <a:schemeClr val="accent1"/>
-          </a:effectRef>
-          <a:fontRef idx="minor">
-            <a:schemeClr val="tx1"/>
-          </a:fontRef>
-        </p:style>
-      </p:cxnSp>
+          <p:cNvGrpSpPr/>
+          <p:nvPr/>
+        </p:nvGrpSpPr>
+        <p:grpSpPr>
+          <a:xfrm>
+            <a:off x="2971800" y="1344275"/>
+            <a:ext cx="5760720" cy="2011680"/>
+            <a:chOff x="731520" y="1280160"/>
+            <a:chExt cx="5760720" cy="2011680"/>
+          </a:xfrm>
+        </p:grpSpPr>
+        <p:sp>
+          <p:nvSpPr>
+            <p:cNvPr id="6" name="Shape 4"/>
+            <p:cNvSpPr/>
+            <p:nvPr/>
+          </p:nvSpPr>
+          <p:spPr>
+            <a:xfrm>
+              <a:off x="731520" y="1463040"/>
+              <a:ext cx="1463040" cy="548640"/>
+            </a:xfrm>
+            <a:prstGeom prst="ellipse">
+              <a:avLst/>
+            </a:prstGeom>
+            <a:solidFill>
+              <a:srgbClr val="8B5CF6"/>
+            </a:solidFill>
+            <a:ln/>
+            <a:effectLst>
+              <a:outerShdw blurRad="50800" dist="25400" dir="8100000" algn="bl" rotWithShape="0">
+                <a:srgbClr val="000000">
+                  <a:alpha val="12000"/>
+                </a:srgbClr>
+              </a:outerShdw>
+            </a:effectLst>
+          </p:spPr>
+        </p:sp>
+        <p:sp>
+          <p:nvSpPr>
+            <p:cNvPr id="7" name="Text 5"/>
+            <p:cNvSpPr/>
+            <p:nvPr/>
+          </p:nvSpPr>
+          <p:spPr>
+            <a:xfrm>
+              <a:off x="731520" y="1481328"/>
+              <a:ext cx="1463040" cy="512064"/>
+            </a:xfrm>
+            <a:prstGeom prst="rect">
+              <a:avLst/>
+            </a:prstGeom>
+            <a:noFill/>
+            <a:ln/>
+          </p:spPr>
+          <p:txBody>
+            <a:bodyPr wrap="square" rtlCol="0" anchor="ctr"/>
+            <a:lstStyle/>
+            <a:p>
+              <a:pPr marL="0" indent="0" algn="ctr">
+                <a:buNone/>
+              </a:pPr>
+              <a:r>
+                <a:rPr lang="en-US" sz="1200" b="1" dirty="0">
+                  <a:solidFill>
+                    <a:srgbClr val="FFFFFF"/>
+                  </a:solidFill>
+                  <a:latin typeface="Arial" pitchFamily="34" charset="0"/>
+                  <a:ea typeface="Arial" pitchFamily="34" charset="-122"/>
+                  <a:cs typeface="Arial" pitchFamily="34" charset="-120"/>
+                </a:rPr>
+                <a:t>Pharmacy</a:t>
+              </a:r>
+              <a:endParaRPr lang="en-US" sz="1200" dirty="0"/>
+            </a:p>
+          </p:txBody>
+        </p:sp>
+        <p:sp>
+          <p:nvSpPr>
+            <p:cNvPr id="8" name="Shape 6"/>
+            <p:cNvSpPr/>
+            <p:nvPr/>
+          </p:nvSpPr>
+          <p:spPr>
+            <a:xfrm>
+              <a:off x="2743200" y="1280160"/>
+              <a:ext cx="1463040" cy="548640"/>
+            </a:xfrm>
+            <a:prstGeom prst="ellipse">
+              <a:avLst/>
+            </a:prstGeom>
+            <a:solidFill>
+              <a:srgbClr val="8B5CF6"/>
+            </a:solidFill>
+            <a:ln/>
+            <a:effectLst>
+              <a:outerShdw blurRad="50800" dist="25400" dir="8100000" algn="bl" rotWithShape="0">
+                <a:srgbClr val="000000">
+                  <a:alpha val="12000"/>
+                </a:srgbClr>
+              </a:outerShdw>
+            </a:effectLst>
+          </p:spPr>
+        </p:sp>
+        <p:sp>
+          <p:nvSpPr>
+            <p:cNvPr id="9" name="Text 7"/>
+            <p:cNvSpPr/>
+            <p:nvPr/>
+          </p:nvSpPr>
+          <p:spPr>
+            <a:xfrm>
+              <a:off x="2743200" y="1298448"/>
+              <a:ext cx="1463040" cy="512064"/>
+            </a:xfrm>
+            <a:prstGeom prst="rect">
+              <a:avLst/>
+            </a:prstGeom>
+            <a:noFill/>
+            <a:ln/>
+          </p:spPr>
+          <p:txBody>
+            <a:bodyPr wrap="square" rtlCol="0" anchor="ctr"/>
+            <a:lstStyle/>
+            <a:p>
+              <a:pPr marL="0" indent="0" algn="ctr">
+                <a:buNone/>
+              </a:pPr>
+              <a:r>
+                <a:rPr lang="en-US" sz="1200" b="1" dirty="0">
+                  <a:solidFill>
+                    <a:srgbClr val="FFFFFF"/>
+                  </a:solidFill>
+                  <a:latin typeface="Arial" pitchFamily="34" charset="0"/>
+                  <a:ea typeface="Arial" pitchFamily="34" charset="-122"/>
+                  <a:cs typeface="Arial" pitchFamily="34" charset="-120"/>
+                </a:rPr>
+                <a:t>Corridor A</a:t>
+              </a:r>
+              <a:endParaRPr lang="en-US" sz="1200" dirty="0"/>
+            </a:p>
+          </p:txBody>
+        </p:sp>
+        <p:sp>
+          <p:nvSpPr>
+            <p:cNvPr id="10" name="Shape 8"/>
+            <p:cNvSpPr/>
+            <p:nvPr/>
+          </p:nvSpPr>
+          <p:spPr>
+            <a:xfrm>
+              <a:off x="5029200" y="1463040"/>
+              <a:ext cx="1463040" cy="548640"/>
+            </a:xfrm>
+            <a:prstGeom prst="ellipse">
+              <a:avLst/>
+            </a:prstGeom>
+            <a:solidFill>
+              <a:srgbClr val="8B5CF6"/>
+            </a:solidFill>
+            <a:ln/>
+            <a:effectLst>
+              <a:outerShdw blurRad="50800" dist="25400" dir="8100000" algn="bl" rotWithShape="0">
+                <a:srgbClr val="000000">
+                  <a:alpha val="12000"/>
+                </a:srgbClr>
+              </a:outerShdw>
+            </a:effectLst>
+          </p:spPr>
+        </p:sp>
+        <p:sp>
+          <p:nvSpPr>
+            <p:cNvPr id="11" name="Text 9"/>
+            <p:cNvSpPr/>
+            <p:nvPr/>
+          </p:nvSpPr>
+          <p:spPr>
+            <a:xfrm>
+              <a:off x="5029200" y="1481328"/>
+              <a:ext cx="1463040" cy="512064"/>
+            </a:xfrm>
+            <a:prstGeom prst="rect">
+              <a:avLst/>
+            </a:prstGeom>
+            <a:noFill/>
+            <a:ln/>
+          </p:spPr>
+          <p:txBody>
+            <a:bodyPr wrap="square" rtlCol="0" anchor="ctr"/>
+            <a:lstStyle/>
+            <a:p>
+              <a:pPr marL="0" indent="0" algn="ctr">
+                <a:buNone/>
+              </a:pPr>
+              <a:r>
+                <a:rPr lang="en-US" sz="1200" b="1" dirty="0">
+                  <a:solidFill>
+                    <a:srgbClr val="FFFFFF"/>
+                  </a:solidFill>
+                  <a:latin typeface="Arial" pitchFamily="34" charset="0"/>
+                  <a:ea typeface="Arial" pitchFamily="34" charset="-122"/>
+                  <a:cs typeface="Arial" pitchFamily="34" charset="-120"/>
+                </a:rPr>
+                <a:t>Elevator</a:t>
+              </a:r>
+              <a:endParaRPr lang="en-US" sz="1200" dirty="0"/>
+            </a:p>
+          </p:txBody>
+        </p:sp>
+        <p:sp>
+          <p:nvSpPr>
+            <p:cNvPr id="12" name="Shape 10"/>
+            <p:cNvSpPr/>
+            <p:nvPr/>
+          </p:nvSpPr>
+          <p:spPr>
+            <a:xfrm>
+              <a:off x="2743200" y="2560320"/>
+              <a:ext cx="1463040" cy="548640"/>
+            </a:xfrm>
+            <a:prstGeom prst="ellipse">
+              <a:avLst/>
+            </a:prstGeom>
+            <a:solidFill>
+              <a:srgbClr val="8B5CF6"/>
+            </a:solidFill>
+            <a:ln/>
+            <a:effectLst>
+              <a:outerShdw blurRad="50800" dist="25400" dir="8100000" algn="bl" rotWithShape="0">
+                <a:srgbClr val="000000">
+                  <a:alpha val="12000"/>
+                </a:srgbClr>
+              </a:outerShdw>
+            </a:effectLst>
+          </p:spPr>
+        </p:sp>
+        <p:sp>
+          <p:nvSpPr>
+            <p:cNvPr id="13" name="Text 11"/>
+            <p:cNvSpPr/>
+            <p:nvPr/>
+          </p:nvSpPr>
+          <p:spPr>
+            <a:xfrm>
+              <a:off x="2743200" y="2578608"/>
+              <a:ext cx="1463040" cy="512064"/>
+            </a:xfrm>
+            <a:prstGeom prst="rect">
+              <a:avLst/>
+            </a:prstGeom>
+            <a:noFill/>
+            <a:ln/>
+          </p:spPr>
+          <p:txBody>
+            <a:bodyPr wrap="square" rtlCol="0" anchor="ctr"/>
+            <a:lstStyle/>
+            <a:p>
+              <a:pPr marL="0" indent="0" algn="ctr">
+                <a:buNone/>
+              </a:pPr>
+              <a:r>
+                <a:rPr lang="en-US" sz="1200" b="1" dirty="0">
+                  <a:solidFill>
+                    <a:srgbClr val="FFFFFF"/>
+                  </a:solidFill>
+                  <a:latin typeface="Arial" pitchFamily="34" charset="0"/>
+                  <a:ea typeface="Arial" pitchFamily="34" charset="-122"/>
+                  <a:cs typeface="Arial" pitchFamily="34" charset="-120"/>
+                </a:rPr>
+                <a:t>Corridor B</a:t>
+              </a:r>
+              <a:endParaRPr lang="en-US" sz="1200" dirty="0"/>
+            </a:p>
+          </p:txBody>
+        </p:sp>
+        <p:sp>
+          <p:nvSpPr>
+            <p:cNvPr id="14" name="Shape 12"/>
+            <p:cNvSpPr/>
+            <p:nvPr/>
+          </p:nvSpPr>
+          <p:spPr>
+            <a:xfrm>
+              <a:off x="5029200" y="2743200"/>
+              <a:ext cx="1463040" cy="548640"/>
+            </a:xfrm>
+            <a:prstGeom prst="ellipse">
+              <a:avLst/>
+            </a:prstGeom>
+            <a:solidFill>
+              <a:srgbClr val="8B5CF6"/>
+            </a:solidFill>
+            <a:ln/>
+            <a:effectLst>
+              <a:outerShdw blurRad="50800" dist="25400" dir="8100000" algn="bl" rotWithShape="0">
+                <a:srgbClr val="000000">
+                  <a:alpha val="12000"/>
+                </a:srgbClr>
+              </a:outerShdw>
+            </a:effectLst>
+          </p:spPr>
+        </p:sp>
+        <p:sp>
+          <p:nvSpPr>
+            <p:cNvPr id="15" name="Text 13"/>
+            <p:cNvSpPr/>
+            <p:nvPr/>
+          </p:nvSpPr>
+          <p:spPr>
+            <a:xfrm>
+              <a:off x="5029200" y="2761488"/>
+              <a:ext cx="1463040" cy="512064"/>
+            </a:xfrm>
+            <a:prstGeom prst="rect">
+              <a:avLst/>
+            </a:prstGeom>
+            <a:noFill/>
+            <a:ln/>
+          </p:spPr>
+          <p:txBody>
+            <a:bodyPr wrap="square" rtlCol="0" anchor="ctr"/>
+            <a:lstStyle/>
+            <a:p>
+              <a:pPr marL="0" indent="0" algn="ctr">
+                <a:buNone/>
+              </a:pPr>
+              <a:r>
+                <a:rPr lang="en-US" sz="1200" b="1" dirty="0">
+                  <a:solidFill>
+                    <a:srgbClr val="FFFFFF"/>
+                  </a:solidFill>
+                  <a:latin typeface="Arial" pitchFamily="34" charset="0"/>
+                  <a:ea typeface="Arial" pitchFamily="34" charset="-122"/>
+                  <a:cs typeface="Arial" pitchFamily="34" charset="-120"/>
+                </a:rPr>
+                <a:t>Ward B</a:t>
+              </a:r>
+              <a:endParaRPr lang="en-US" sz="1200" dirty="0"/>
+            </a:p>
+          </p:txBody>
+        </p:sp>
+        <p:sp>
+          <p:nvSpPr>
+            <p:cNvPr id="16" name="Shape 14"/>
+            <p:cNvSpPr/>
+            <p:nvPr/>
+          </p:nvSpPr>
+          <p:spPr>
+            <a:xfrm>
+              <a:off x="731520" y="2743200"/>
+              <a:ext cx="1463040" cy="548640"/>
+            </a:xfrm>
+            <a:prstGeom prst="ellipse">
+              <a:avLst/>
+            </a:prstGeom>
+            <a:solidFill>
+              <a:srgbClr val="8B5CF6"/>
+            </a:solidFill>
+            <a:ln/>
+            <a:effectLst>
+              <a:outerShdw blurRad="50800" dist="25400" dir="8100000" algn="bl" rotWithShape="0">
+                <a:srgbClr val="000000">
+                  <a:alpha val="12000"/>
+                </a:srgbClr>
+              </a:outerShdw>
+            </a:effectLst>
+          </p:spPr>
+        </p:sp>
+        <p:sp>
+          <p:nvSpPr>
+            <p:cNvPr id="17" name="Text 15"/>
+            <p:cNvSpPr/>
+            <p:nvPr/>
+          </p:nvSpPr>
+          <p:spPr>
+            <a:xfrm>
+              <a:off x="731520" y="2761488"/>
+              <a:ext cx="1463040" cy="512064"/>
+            </a:xfrm>
+            <a:prstGeom prst="rect">
+              <a:avLst/>
+            </a:prstGeom>
+            <a:noFill/>
+            <a:ln/>
+          </p:spPr>
+          <p:txBody>
+            <a:bodyPr wrap="square" rtlCol="0" anchor="ctr"/>
+            <a:lstStyle/>
+            <a:p>
+              <a:pPr marL="0" indent="0" algn="ctr">
+                <a:buNone/>
+              </a:pPr>
+              <a:r>
+                <a:rPr lang="en-US" sz="1200" b="1" dirty="0">
+                  <a:solidFill>
+                    <a:srgbClr val="FFFFFF"/>
+                  </a:solidFill>
+                  <a:latin typeface="Arial" pitchFamily="34" charset="0"/>
+                  <a:ea typeface="Arial" pitchFamily="34" charset="-122"/>
+                  <a:cs typeface="Arial" pitchFamily="34" charset="-120"/>
+                </a:rPr>
+                <a:t>Lab</a:t>
+              </a:r>
+              <a:endParaRPr lang="en-US" sz="1200" dirty="0"/>
+            </a:p>
+          </p:txBody>
+        </p:sp>
+        <p:cxnSp>
+          <p:nvCxnSpPr>
+            <p:cNvPr id="27" name="Connector: Curved 26">
+              <a:extLst>
+                <a:ext uri="{FF2B5EF4-FFF2-40B4-BE49-F238E27FC236}">
+                  <a16:creationId xmlns:a16="http://schemas.microsoft.com/office/drawing/2014/main" id="{FF85CF94-2DC4-4DF8-883F-6781F7A2C9DD}"/>
+                </a:ext>
+              </a:extLst>
+            </p:cNvPr>
+            <p:cNvCxnSpPr>
+              <a:stCxn id="7" idx="3"/>
+              <a:endCxn id="8" idx="2"/>
+            </p:cNvCxnSpPr>
+            <p:nvPr/>
+          </p:nvCxnSpPr>
+          <p:spPr>
+            <a:xfrm flipV="1">
+              <a:off x="2194560" y="1554480"/>
+              <a:ext cx="548640" cy="182880"/>
+            </a:xfrm>
+            <a:prstGeom prst="curvedConnector3">
+              <a:avLst/>
+            </a:prstGeom>
+            <a:ln>
+              <a:headEnd type="triangle"/>
+              <a:tailEnd type="triangle"/>
+            </a:ln>
+          </p:spPr>
+          <p:style>
+            <a:lnRef idx="1">
+              <a:schemeClr val="accent1"/>
+            </a:lnRef>
+            <a:fillRef idx="0">
+              <a:schemeClr val="accent1"/>
+            </a:fillRef>
+            <a:effectRef idx="0">
+              <a:schemeClr val="accent1"/>
+            </a:effectRef>
+            <a:fontRef idx="minor">
+              <a:schemeClr val="tx1"/>
+            </a:fontRef>
+          </p:style>
+        </p:cxnSp>
+        <p:cxnSp>
+          <p:nvCxnSpPr>
+            <p:cNvPr id="29" name="Connector: Curved 28">
+              <a:extLst>
+                <a:ext uri="{FF2B5EF4-FFF2-40B4-BE49-F238E27FC236}">
+                  <a16:creationId xmlns:a16="http://schemas.microsoft.com/office/drawing/2014/main" id="{C543B711-F424-47ED-9F84-A4571F286F0B}"/>
+                </a:ext>
+              </a:extLst>
+            </p:cNvPr>
+            <p:cNvCxnSpPr>
+              <a:stCxn id="9" idx="3"/>
+              <a:endCxn id="10" idx="2"/>
+            </p:cNvCxnSpPr>
+            <p:nvPr/>
+          </p:nvCxnSpPr>
+          <p:spPr>
+            <a:xfrm>
+              <a:off x="4206240" y="1554480"/>
+              <a:ext cx="822960" cy="182880"/>
+            </a:xfrm>
+            <a:prstGeom prst="curvedConnector3">
+              <a:avLst/>
+            </a:prstGeom>
+            <a:ln>
+              <a:headEnd type="triangle"/>
+              <a:tailEnd type="triangle"/>
+            </a:ln>
+          </p:spPr>
+          <p:style>
+            <a:lnRef idx="1">
+              <a:schemeClr val="accent1"/>
+            </a:lnRef>
+            <a:fillRef idx="0">
+              <a:schemeClr val="accent1"/>
+            </a:fillRef>
+            <a:effectRef idx="0">
+              <a:schemeClr val="accent1"/>
+            </a:effectRef>
+            <a:fontRef idx="minor">
+              <a:schemeClr val="tx1"/>
+            </a:fontRef>
+          </p:style>
+        </p:cxnSp>
+        <p:cxnSp>
+          <p:nvCxnSpPr>
+            <p:cNvPr id="31" name="Connector: Curved 30">
+              <a:extLst>
+                <a:ext uri="{FF2B5EF4-FFF2-40B4-BE49-F238E27FC236}">
+                  <a16:creationId xmlns:a16="http://schemas.microsoft.com/office/drawing/2014/main" id="{37BF6ED7-B77C-4308-912D-C7A307F106A9}"/>
+                </a:ext>
+              </a:extLst>
+            </p:cNvPr>
+            <p:cNvCxnSpPr>
+              <a:stCxn id="10" idx="3"/>
+              <a:endCxn id="12" idx="0"/>
+            </p:cNvCxnSpPr>
+            <p:nvPr/>
+          </p:nvCxnSpPr>
+          <p:spPr>
+            <a:xfrm rot="5400000">
+              <a:off x="4044596" y="1361459"/>
+              <a:ext cx="628986" cy="1768737"/>
+            </a:xfrm>
+            <a:prstGeom prst="curvedConnector3">
+              <a:avLst/>
+            </a:prstGeom>
+            <a:ln>
+              <a:headEnd type="triangle"/>
+              <a:tailEnd type="triangle"/>
+            </a:ln>
+          </p:spPr>
+          <p:style>
+            <a:lnRef idx="1">
+              <a:schemeClr val="accent1"/>
+            </a:lnRef>
+            <a:fillRef idx="0">
+              <a:schemeClr val="accent1"/>
+            </a:fillRef>
+            <a:effectRef idx="0">
+              <a:schemeClr val="accent1"/>
+            </a:effectRef>
+            <a:fontRef idx="minor">
+              <a:schemeClr val="tx1"/>
+            </a:fontRef>
+          </p:style>
+        </p:cxnSp>
+        <p:cxnSp>
+          <p:nvCxnSpPr>
+            <p:cNvPr id="33" name="Connector: Curved 32">
+              <a:extLst>
+                <a:ext uri="{FF2B5EF4-FFF2-40B4-BE49-F238E27FC236}">
+                  <a16:creationId xmlns:a16="http://schemas.microsoft.com/office/drawing/2014/main" id="{17AC40CD-0A85-4E07-8326-1EECA23D0B1B}"/>
+                </a:ext>
+              </a:extLst>
+            </p:cNvPr>
+            <p:cNvCxnSpPr>
+              <a:stCxn id="17" idx="3"/>
+              <a:endCxn id="12" idx="2"/>
+            </p:cNvCxnSpPr>
+            <p:nvPr/>
+          </p:nvCxnSpPr>
+          <p:spPr>
+            <a:xfrm flipV="1">
+              <a:off x="2194560" y="2834640"/>
+              <a:ext cx="548640" cy="182880"/>
+            </a:xfrm>
+            <a:prstGeom prst="curvedConnector3">
+              <a:avLst/>
+            </a:prstGeom>
+            <a:ln>
+              <a:headEnd type="triangle"/>
+              <a:tailEnd type="triangle"/>
+            </a:ln>
+          </p:spPr>
+          <p:style>
+            <a:lnRef idx="1">
+              <a:schemeClr val="accent1"/>
+            </a:lnRef>
+            <a:fillRef idx="0">
+              <a:schemeClr val="accent1"/>
+            </a:fillRef>
+            <a:effectRef idx="0">
+              <a:schemeClr val="accent1"/>
+            </a:effectRef>
+            <a:fontRef idx="minor">
+              <a:schemeClr val="tx1"/>
+            </a:fontRef>
+          </p:style>
+        </p:cxnSp>
+        <p:cxnSp>
+          <p:nvCxnSpPr>
+            <p:cNvPr id="35" name="Connector: Curved 34">
+              <a:extLst>
+                <a:ext uri="{FF2B5EF4-FFF2-40B4-BE49-F238E27FC236}">
+                  <a16:creationId xmlns:a16="http://schemas.microsoft.com/office/drawing/2014/main" id="{A4F0FB54-9BF0-40CC-A920-17EB00204385}"/>
+                </a:ext>
+              </a:extLst>
+            </p:cNvPr>
+            <p:cNvCxnSpPr>
+              <a:stCxn id="13" idx="3"/>
+              <a:endCxn id="15" idx="1"/>
+            </p:cNvCxnSpPr>
+            <p:nvPr/>
+          </p:nvCxnSpPr>
+          <p:spPr>
+            <a:xfrm>
+              <a:off x="4206240" y="2834640"/>
+              <a:ext cx="822960" cy="182880"/>
+            </a:xfrm>
+            <a:prstGeom prst="curvedConnector3">
+              <a:avLst/>
+            </a:prstGeom>
+            <a:ln>
+              <a:headEnd type="triangle"/>
+              <a:tailEnd type="triangle"/>
+            </a:ln>
+          </p:spPr>
+          <p:style>
+            <a:lnRef idx="1">
+              <a:schemeClr val="accent1"/>
+            </a:lnRef>
+            <a:fillRef idx="0">
+              <a:schemeClr val="accent1"/>
+            </a:fillRef>
+            <a:effectRef idx="0">
+              <a:schemeClr val="accent1"/>
+            </a:effectRef>
+            <a:fontRef idx="minor">
+              <a:schemeClr val="tx1"/>
+            </a:fontRef>
+          </p:style>
+        </p:cxnSp>
+      </p:grpSp>
     </p:spTree>
   </p:cSld>
   <p:clrMapOvr>
@@ -8145,8 +8243,8 @@
         </p:nvSpPr>
         <p:spPr>
           <a:xfrm>
-            <a:off x="365760" y="2743200"/>
-            <a:ext cx="8412480" cy="365760"/>
+            <a:off x="365760" y="2743199"/>
+            <a:ext cx="8412480" cy="893135"/>
           </a:xfrm>
           <a:prstGeom prst="rect">
             <a:avLst/>
@@ -8170,7 +8268,36 @@
                 <a:ea typeface="Arial" pitchFamily="34" charset="-122"/>
                 <a:cs typeface="Arial" pitchFamily="34" charset="-120"/>
               </a:rPr>
-              <a:t>Semantic maps combine perception + mapping. Active research area.</a:t>
+              <a:t>Semantic maps combine perception + mapping. </a:t>
+            </a:r>
+          </a:p>
+          <a:p>
+            <a:pPr marL="0" indent="0">
+              <a:buNone/>
+            </a:pPr>
+            <a:endParaRPr lang="en-US" sz="1200" b="1" dirty="0">
+              <a:solidFill>
+                <a:srgbClr val="0F4C81"/>
+              </a:solidFill>
+              <a:latin typeface="Arial" pitchFamily="34" charset="0"/>
+              <a:ea typeface="Arial" pitchFamily="34" charset="-122"/>
+              <a:cs typeface="Arial" pitchFamily="34" charset="-120"/>
+            </a:endParaRPr>
+          </a:p>
+          <a:p>
+            <a:pPr marL="0" indent="0">
+              <a:buNone/>
+            </a:pPr>
+            <a:r>
+              <a:rPr lang="en-US" sz="1200" b="1" dirty="0">
+                <a:solidFill>
+                  <a:srgbClr val="0F4C81"/>
+                </a:solidFill>
+                <a:latin typeface="Arial" pitchFamily="34" charset="0"/>
+                <a:ea typeface="Arial" pitchFamily="34" charset="-122"/>
+                <a:cs typeface="Arial" pitchFamily="34" charset="-120"/>
+              </a:rPr>
+              <a:t>Active research area.</a:t>
             </a:r>
             <a:endParaRPr lang="en-US" sz="1200" dirty="0"/>
           </a:p>
@@ -11038,7 +11165,7 @@
         <p:spPr>
           <a:xfrm>
             <a:off x="301752" y="721950"/>
-            <a:ext cx="8595360" cy="809137"/>
+            <a:ext cx="8595360" cy="1291148"/>
           </a:xfrm>
           <a:prstGeom prst="rect">
             <a:avLst/>
@@ -11056,8 +11183,8 @@
           </a:effectLst>
         </p:spPr>
       </p:sp>
-      <mc:AlternateContent xmlns:mc="http://schemas.openxmlformats.org/markup-compatibility/2006">
-        <mc:Choice xmlns:a14="http://schemas.microsoft.com/office/drawing/2010/main" Requires="a14">
+      <mc:AlternateContent xmlns:mc="http://schemas.openxmlformats.org/markup-compatibility/2006" xmlns:a14="http://schemas.microsoft.com/office/drawing/2010/main">
+        <mc:Choice Requires="a14">
           <p:sp>
             <p:nvSpPr>
               <p:cNvPr id="6" name="Text 4"/>
@@ -11451,7 +11578,7 @@
             </p:txBody>
           </p:sp>
         </mc:Choice>
-        <mc:Fallback>
+        <mc:Fallback xmlns="">
           <p:sp>
             <p:nvSpPr>
               <p:cNvPr id="6" name="Text 4"/>
@@ -11524,7 +11651,23 @@
                 <a:ea typeface="Arial" pitchFamily="34" charset="-122"/>
                 <a:cs typeface="Arial" pitchFamily="34" charset="-120"/>
               </a:rPr>
-              <a:t>Full = entire trajectory + map (graph-SLAM). Online = current pose + map (EKF-SLAM, FastSLAM).</a:t>
+              <a:t>Full = entire trajectory + map (graph-SLAM). </a:t>
+            </a:r>
+          </a:p>
+          <a:p>
+            <a:pPr marL="0" indent="0">
+              <a:buNone/>
+            </a:pPr>
+            <a:r>
+              <a:rPr lang="en-US" sz="1200" dirty="0">
+                <a:solidFill>
+                  <a:srgbClr val="1F2937"/>
+                </a:solidFill>
+                <a:latin typeface="Arial" pitchFamily="34" charset="0"/>
+                <a:ea typeface="Arial" pitchFamily="34" charset="-122"/>
+                <a:cs typeface="Arial" pitchFamily="34" charset="-120"/>
+              </a:rPr>
+              <a:t>Online = current pose + map (EKF-SLAM, FastSLAM).</a:t>
             </a:r>
             <a:endParaRPr lang="en-US" sz="1200" dirty="0"/>
           </a:p>
@@ -11538,7 +11681,7 @@
         </p:nvSpPr>
         <p:spPr>
           <a:xfrm>
-            <a:off x="274320" y="1645920"/>
+            <a:off x="274320" y="2822588"/>
             <a:ext cx="4114800" cy="1371600"/>
           </a:xfrm>
           <a:prstGeom prst="rect">
@@ -11565,7 +11708,7 @@
         </p:nvSpPr>
         <p:spPr>
           <a:xfrm>
-            <a:off x="274320" y="1645920"/>
+            <a:off x="274320" y="2822588"/>
             <a:ext cx="54864" cy="1371600"/>
           </a:xfrm>
           <a:prstGeom prst="rect">
@@ -11585,7 +11728,7 @@
         </p:nvSpPr>
         <p:spPr>
           <a:xfrm>
-            <a:off x="438912" y="1700784"/>
+            <a:off x="438912" y="2877452"/>
             <a:ext cx="3840480" cy="274320"/>
           </a:xfrm>
           <a:prstGeom prst="rect">
@@ -11624,7 +11767,7 @@
         </p:nvSpPr>
         <p:spPr>
           <a:xfrm>
-            <a:off x="438912" y="1993392"/>
+            <a:off x="438912" y="3170060"/>
             <a:ext cx="3840480" cy="960120"/>
           </a:xfrm>
           <a:prstGeom prst="rect">
@@ -11717,7 +11860,7 @@
         </p:nvSpPr>
         <p:spPr>
           <a:xfrm>
-            <a:off x="4663440" y="1645920"/>
+            <a:off x="4663440" y="2822588"/>
             <a:ext cx="4206240" cy="1371600"/>
           </a:xfrm>
           <a:prstGeom prst="rect">
@@ -11744,7 +11887,7 @@
         </p:nvSpPr>
         <p:spPr>
           <a:xfrm>
-            <a:off x="4663440" y="1645920"/>
+            <a:off x="4663440" y="2822588"/>
             <a:ext cx="54864" cy="1371600"/>
           </a:xfrm>
           <a:prstGeom prst="rect">
@@ -11764,7 +11907,7 @@
         </p:nvSpPr>
         <p:spPr>
           <a:xfrm>
-            <a:off x="4828032" y="1700784"/>
+            <a:off x="4828032" y="2877452"/>
             <a:ext cx="3931920" cy="274320"/>
           </a:xfrm>
           <a:prstGeom prst="rect">
@@ -11803,7 +11946,7 @@
         </p:nvSpPr>
         <p:spPr>
           <a:xfrm>
-            <a:off x="4828032" y="1993392"/>
+            <a:off x="4828032" y="3170060"/>
             <a:ext cx="3931920" cy="960120"/>
           </a:xfrm>
           <a:prstGeom prst="rect">
@@ -12623,7 +12766,7 @@
         <p:spPr>
           <a:xfrm>
             <a:off x="274320" y="2926080"/>
-            <a:ext cx="8595360" cy="274320"/>
+            <a:ext cx="8595360" cy="688990"/>
           </a:xfrm>
           <a:prstGeom prst="rect">
             <a:avLst/>
@@ -12647,7 +12790,23 @@
                 <a:ea typeface="Arial" pitchFamily="34" charset="-122"/>
                 <a:cs typeface="Arial" pitchFamily="34" charset="-120"/>
               </a:rPr>
-              <a:t>Each exploits the SLAM structure differently. Let's dive into each algorithm.</a:t>
+              <a:t>Each exploits the SLAM structure differently. </a:t>
+            </a:r>
+          </a:p>
+          <a:p>
+            <a:pPr marL="0" indent="0">
+              <a:buNone/>
+            </a:pPr>
+            <a:r>
+              <a:rPr lang="en-US" sz="1200" b="1" dirty="0">
+                <a:solidFill>
+                  <a:srgbClr val="0F4C81"/>
+                </a:solidFill>
+                <a:latin typeface="Arial" pitchFamily="34" charset="0"/>
+                <a:ea typeface="Arial" pitchFamily="34" charset="-122"/>
+                <a:cs typeface="Arial" pitchFamily="34" charset="-120"/>
+              </a:rPr>
+              <a:t>Let's dive into each algorithm.</a:t>
             </a:r>
             <a:endParaRPr lang="en-US" sz="1200" dirty="0"/>
           </a:p>
@@ -12942,8 +13101,8 @@
         </p:nvSpPr>
         <p:spPr>
           <a:xfrm>
-            <a:off x="274320" y="685800"/>
-            <a:ext cx="8595360" cy="731520"/>
+            <a:off x="274320" y="685799"/>
+            <a:ext cx="8595360" cy="1054393"/>
           </a:xfrm>
           <a:prstGeom prst="rect">
             <a:avLst/>
@@ -13025,7 +13184,55 @@
                 <a:ea typeface="Arial" pitchFamily="34" charset="-122"/>
                 <a:cs typeface="Arial" pitchFamily="34" charset="-120"/>
               </a:rPr>
-              <a:t>MediBot detects a corridor corner. Map has 5 known corners. Which one? Wrong association -&gt; EKF corrects wrong landmark -&gt; map corrupts, localization diverges. Data association is CRITICAL.</a:t>
+              <a:t>MediBot detects a corridor corner. </a:t>
+            </a:r>
+          </a:p>
+          <a:p>
+            <a:pPr marL="0" indent="0">
+              <a:buNone/>
+            </a:pPr>
+            <a:r>
+              <a:rPr lang="en-US" sz="1200" dirty="0">
+                <a:solidFill>
+                  <a:srgbClr val="1F2937"/>
+                </a:solidFill>
+                <a:latin typeface="Arial" pitchFamily="34" charset="0"/>
+                <a:ea typeface="Arial" pitchFamily="34" charset="-122"/>
+                <a:cs typeface="Arial" pitchFamily="34" charset="-120"/>
+              </a:rPr>
+              <a:t>Map has 5 known corners. Which one? </a:t>
+            </a:r>
+          </a:p>
+          <a:p>
+            <a:pPr marL="0" indent="0">
+              <a:buNone/>
+            </a:pPr>
+            <a:r>
+              <a:rPr lang="en-US" sz="1200" dirty="0">
+                <a:solidFill>
+                  <a:srgbClr val="1F2937"/>
+                </a:solidFill>
+                <a:latin typeface="Arial" pitchFamily="34" charset="0"/>
+                <a:ea typeface="Arial" pitchFamily="34" charset="-122"/>
+                <a:cs typeface="Arial" pitchFamily="34" charset="-120"/>
+              </a:rPr>
+              <a:t>Wrong association -&gt; EKF corrects wrong landmark -&gt; map corrupts, localization diverges. </a:t>
+            </a:r>
+          </a:p>
+          <a:p>
+            <a:pPr marL="0" indent="0">
+              <a:buNone/>
+            </a:pPr>
+            <a:r>
+              <a:rPr lang="en-US" sz="1200" dirty="0">
+                <a:solidFill>
+                  <a:srgbClr val="1F2937"/>
+                </a:solidFill>
+                <a:latin typeface="Arial" pitchFamily="34" charset="0"/>
+                <a:ea typeface="Arial" pitchFamily="34" charset="-122"/>
+                <a:cs typeface="Arial" pitchFamily="34" charset="-120"/>
+              </a:rPr>
+              <a:t>Data association is CRITICAL.</a:t>
             </a:r>
             <a:endParaRPr lang="en-US" sz="1200" dirty="0"/>
           </a:p>
@@ -13039,7 +13246,7 @@
         </p:nvSpPr>
         <p:spPr>
           <a:xfrm>
-            <a:off x="182880" y="1600200"/>
+            <a:off x="182880" y="1968793"/>
             <a:ext cx="2834640" cy="1828800"/>
           </a:xfrm>
           <a:prstGeom prst="rect">
@@ -13066,7 +13273,7 @@
         </p:nvSpPr>
         <p:spPr>
           <a:xfrm>
-            <a:off x="182880" y="1600200"/>
+            <a:off x="182880" y="1968793"/>
             <a:ext cx="54864" cy="1828800"/>
           </a:xfrm>
           <a:prstGeom prst="rect">
@@ -13086,7 +13293,7 @@
         </p:nvSpPr>
         <p:spPr>
           <a:xfrm>
-            <a:off x="347472" y="1655064"/>
+            <a:off x="347472" y="2023657"/>
             <a:ext cx="2560320" cy="274320"/>
           </a:xfrm>
           <a:prstGeom prst="rect">
@@ -13125,7 +13332,7 @@
         </p:nvSpPr>
         <p:spPr>
           <a:xfrm>
-            <a:off x="347472" y="1947672"/>
+            <a:off x="347472" y="2316265"/>
             <a:ext cx="2560320" cy="1417320"/>
           </a:xfrm>
           <a:prstGeom prst="rect">
@@ -13219,7 +13426,7 @@
         </p:nvSpPr>
         <p:spPr>
           <a:xfrm>
-            <a:off x="3154680" y="1600200"/>
+            <a:off x="3154680" y="1968793"/>
             <a:ext cx="2834640" cy="1828800"/>
           </a:xfrm>
           <a:prstGeom prst="rect">
@@ -13246,7 +13453,7 @@
         </p:nvSpPr>
         <p:spPr>
           <a:xfrm>
-            <a:off x="3154680" y="1600200"/>
+            <a:off x="3154680" y="1968793"/>
             <a:ext cx="54864" cy="1828800"/>
           </a:xfrm>
           <a:prstGeom prst="rect">
@@ -13266,7 +13473,7 @@
         </p:nvSpPr>
         <p:spPr>
           <a:xfrm>
-            <a:off x="3319272" y="1655064"/>
+            <a:off x="3319272" y="2023657"/>
             <a:ext cx="2560320" cy="274320"/>
           </a:xfrm>
           <a:prstGeom prst="rect">
@@ -13297,8 +13504,8 @@
           </a:p>
         </p:txBody>
       </p:sp>
-      <mc:AlternateContent xmlns:mc="http://schemas.openxmlformats.org/markup-compatibility/2006">
-        <mc:Choice xmlns:a14="http://schemas.microsoft.com/office/drawing/2010/main" Requires="a14">
+      <mc:AlternateContent xmlns:mc="http://schemas.openxmlformats.org/markup-compatibility/2006" xmlns:a14="http://schemas.microsoft.com/office/drawing/2010/main">
+        <mc:Choice Requires="a14">
           <p:sp>
             <p:nvSpPr>
               <p:cNvPr id="15" name="Text 13"/>
@@ -13307,7 +13514,7 @@
             </p:nvSpPr>
             <p:spPr>
               <a:xfrm>
-                <a:off x="3319272" y="1947672"/>
+                <a:off x="3319272" y="2316265"/>
                 <a:ext cx="2560320" cy="1417320"/>
               </a:xfrm>
               <a:prstGeom prst="rect">
@@ -13442,7 +13649,7 @@
             </p:txBody>
           </p:sp>
         </mc:Choice>
-        <mc:Fallback>
+        <mc:Fallback xmlns="">
           <p:sp>
             <p:nvSpPr>
               <p:cNvPr id="15" name="Text 13"/>
@@ -13453,7 +13660,7 @@
             </p:nvSpPr>
             <p:spPr>
               <a:xfrm>
-                <a:off x="3319272" y="1947672"/>
+                <a:off x="3319272" y="2316265"/>
                 <a:ext cx="2560320" cy="1417320"/>
               </a:xfrm>
               <a:prstGeom prst="rect">
@@ -13490,7 +13697,7 @@
         </p:nvSpPr>
         <p:spPr>
           <a:xfrm>
-            <a:off x="6126480" y="1600200"/>
+            <a:off x="6126480" y="1968793"/>
             <a:ext cx="2834640" cy="1828800"/>
           </a:xfrm>
           <a:prstGeom prst="rect">
@@ -13517,7 +13724,7 @@
         </p:nvSpPr>
         <p:spPr>
           <a:xfrm>
-            <a:off x="6126480" y="1600200"/>
+            <a:off x="6126480" y="1968793"/>
             <a:ext cx="54864" cy="1828800"/>
           </a:xfrm>
           <a:prstGeom prst="rect">
@@ -13537,7 +13744,7 @@
         </p:nvSpPr>
         <p:spPr>
           <a:xfrm>
-            <a:off x="6291072" y="1655064"/>
+            <a:off x="6291072" y="2023657"/>
             <a:ext cx="2560320" cy="274320"/>
           </a:xfrm>
           <a:prstGeom prst="rect">
@@ -13578,7 +13785,7 @@
             </p:nvSpPr>
             <p:spPr>
               <a:xfrm>
-                <a:off x="6291072" y="1947672"/>
+                <a:off x="6291072" y="2316265"/>
                 <a:ext cx="2560320" cy="1417320"/>
               </a:xfrm>
               <a:prstGeom prst="rect">
@@ -13837,7 +14044,7 @@
             </p:nvSpPr>
             <p:spPr>
               <a:xfrm>
-                <a:off x="6291072" y="1947672"/>
+                <a:off x="6291072" y="2316265"/>
                 <a:ext cx="2560320" cy="1417320"/>
               </a:xfrm>
               <a:prstGeom prst="rect">
@@ -13846,7 +14053,7 @@
               <a:blipFill>
                 <a:blip r:embed="rId4"/>
                 <a:stretch>
-                  <a:fillRect t="-862" b="-431"/>
+                  <a:fillRect t="-862" b="-862"/>
                 </a:stretch>
               </a:blipFill>
               <a:ln/>
@@ -13874,7 +14081,7 @@
         </p:nvSpPr>
         <p:spPr>
           <a:xfrm>
-            <a:off x="274320" y="3657600"/>
+            <a:off x="274320" y="4026193"/>
             <a:ext cx="8595360" cy="274320"/>
           </a:xfrm>
           <a:prstGeom prst="rect">
@@ -14288,8 +14495,8 @@
           </a:p>
         </p:txBody>
       </p:sp>
-      <mc:AlternateContent xmlns:mc="http://schemas.openxmlformats.org/markup-compatibility/2006">
-        <mc:Choice xmlns:a14="http://schemas.microsoft.com/office/drawing/2010/main" Requires="a14">
+      <mc:AlternateContent xmlns:mc="http://schemas.openxmlformats.org/markup-compatibility/2006" xmlns:a14="http://schemas.microsoft.com/office/drawing/2010/main">
+        <mc:Choice Requires="a14">
           <p:sp>
             <p:nvSpPr>
               <p:cNvPr id="8" name="Text 6"/>
@@ -14404,7 +14611,51 @@
                         <a:ea typeface="Arial" pitchFamily="34" charset="-122"/>
                         <a:cs typeface="Arial" pitchFamily="34" charset="-120"/>
                       </a:rPr>
-                      <m:t>𝑡h𝑟𝑒𝑠h𝑜𝑙𝑑</m:t>
+                      <m:t>𝑡</m:t>
+                    </m:r>
+                    <m:r>
+                      <a:rPr lang="en-US" sz="1200" i="1" dirty="0" smtClean="0">
+                        <a:solidFill>
+                          <a:srgbClr val="6B7280"/>
+                        </a:solidFill>
+                        <a:latin typeface="Cambria Math" panose="02040503050406030204" pitchFamily="18" charset="0"/>
+                        <a:ea typeface="Arial" pitchFamily="34" charset="-122"/>
+                        <a:cs typeface="Arial" pitchFamily="34" charset="-120"/>
+                      </a:rPr>
+                      <m:t>h</m:t>
+                    </m:r>
+                    <m:r>
+                      <a:rPr lang="en-US" sz="1200" i="1" dirty="0" smtClean="0">
+                        <a:solidFill>
+                          <a:srgbClr val="6B7280"/>
+                        </a:solidFill>
+                        <a:latin typeface="Cambria Math" panose="02040503050406030204" pitchFamily="18" charset="0"/>
+                        <a:ea typeface="Arial" pitchFamily="34" charset="-122"/>
+                        <a:cs typeface="Arial" pitchFamily="34" charset="-120"/>
+                      </a:rPr>
+                      <m:t>𝑟𝑒𝑠</m:t>
+                    </m:r>
+                    <m:r>
+                      <a:rPr lang="en-US" sz="1200" i="1" dirty="0" smtClean="0">
+                        <a:solidFill>
+                          <a:srgbClr val="6B7280"/>
+                        </a:solidFill>
+                        <a:latin typeface="Cambria Math" panose="02040503050406030204" pitchFamily="18" charset="0"/>
+                        <a:ea typeface="Arial" pitchFamily="34" charset="-122"/>
+                        <a:cs typeface="Arial" pitchFamily="34" charset="-120"/>
+                      </a:rPr>
+                      <m:t>h</m:t>
+                    </m:r>
+                    <m:r>
+                      <a:rPr lang="en-US" sz="1200" i="1" dirty="0" smtClean="0">
+                        <a:solidFill>
+                          <a:srgbClr val="6B7280"/>
+                        </a:solidFill>
+                        <a:latin typeface="Cambria Math" panose="02040503050406030204" pitchFamily="18" charset="0"/>
+                        <a:ea typeface="Arial" pitchFamily="34" charset="-122"/>
+                        <a:cs typeface="Arial" pitchFamily="34" charset="-120"/>
+                      </a:rPr>
+                      <m:t>𝑜𝑙𝑑</m:t>
                     </m:r>
                   </m:oMath>
                 </a14:m>
@@ -14537,7 +14788,51 @@
                         <a:ea typeface="Arial" pitchFamily="34" charset="-122"/>
                         <a:cs typeface="Arial" pitchFamily="34" charset="-120"/>
                       </a:rPr>
-                      <m:t>𝑡h𝑟𝑒𝑠h𝑜𝑙𝑑</m:t>
+                      <m:t>𝑡</m:t>
+                    </m:r>
+                    <m:r>
+                      <a:rPr lang="en-US" sz="1200" i="1" dirty="0">
+                        <a:solidFill>
+                          <a:srgbClr val="6B7280"/>
+                        </a:solidFill>
+                        <a:latin typeface="Cambria Math" panose="02040503050406030204" pitchFamily="18" charset="0"/>
+                        <a:ea typeface="Arial" pitchFamily="34" charset="-122"/>
+                        <a:cs typeface="Arial" pitchFamily="34" charset="-120"/>
+                      </a:rPr>
+                      <m:t>h</m:t>
+                    </m:r>
+                    <m:r>
+                      <a:rPr lang="en-US" sz="1200" i="1" dirty="0">
+                        <a:solidFill>
+                          <a:srgbClr val="6B7280"/>
+                        </a:solidFill>
+                        <a:latin typeface="Cambria Math" panose="02040503050406030204" pitchFamily="18" charset="0"/>
+                        <a:ea typeface="Arial" pitchFamily="34" charset="-122"/>
+                        <a:cs typeface="Arial" pitchFamily="34" charset="-120"/>
+                      </a:rPr>
+                      <m:t>𝑟𝑒𝑠</m:t>
+                    </m:r>
+                    <m:r>
+                      <a:rPr lang="en-US" sz="1200" i="1" dirty="0">
+                        <a:solidFill>
+                          <a:srgbClr val="6B7280"/>
+                        </a:solidFill>
+                        <a:latin typeface="Cambria Math" panose="02040503050406030204" pitchFamily="18" charset="0"/>
+                        <a:ea typeface="Arial" pitchFamily="34" charset="-122"/>
+                        <a:cs typeface="Arial" pitchFamily="34" charset="-120"/>
+                      </a:rPr>
+                      <m:t>h</m:t>
+                    </m:r>
+                    <m:r>
+                      <a:rPr lang="en-US" sz="1200" i="1" dirty="0">
+                        <a:solidFill>
+                          <a:srgbClr val="6B7280"/>
+                        </a:solidFill>
+                        <a:latin typeface="Cambria Math" panose="02040503050406030204" pitchFamily="18" charset="0"/>
+                        <a:ea typeface="Arial" pitchFamily="34" charset="-122"/>
+                        <a:cs typeface="Arial" pitchFamily="34" charset="-120"/>
+                      </a:rPr>
+                      <m:t>𝑜𝑙𝑑</m:t>
                     </m:r>
                   </m:oMath>
                 </a14:m>
@@ -14593,7 +14888,7 @@
             </p:txBody>
           </p:sp>
         </mc:Choice>
-        <mc:Fallback>
+        <mc:Fallback xmlns="">
           <p:sp>
             <p:nvSpPr>
               <p:cNvPr id="8" name="Text 6"/>
@@ -15121,8 +15416,8 @@
           </a:effectLst>
         </p:spPr>
       </p:sp>
-      <mc:AlternateContent xmlns:mc="http://schemas.openxmlformats.org/markup-compatibility/2006">
-        <mc:Choice xmlns:a14="http://schemas.microsoft.com/office/drawing/2010/main" Requires="a14">
+      <mc:AlternateContent xmlns:mc="http://schemas.openxmlformats.org/markup-compatibility/2006" xmlns:a14="http://schemas.microsoft.com/office/drawing/2010/main">
+        <mc:Choice Requires="a14">
           <p:sp>
             <p:nvSpPr>
               <p:cNvPr id="6" name="Text 4"/>
@@ -15323,7 +15618,29 @@
                                 <a:ea typeface="Arial" pitchFamily="34" charset="-122"/>
                                 <a:cs typeface="Arial" pitchFamily="34" charset="-120"/>
                               </a:rPr>
-                              <m:t>𝑡h𝑒𝑡𝑎</m:t>
+                              <m:t>𝑡</m:t>
+                            </m:r>
+                            <m:r>
+                              <a:rPr lang="en-US" sz="1400" b="0" i="1" dirty="0" smtClean="0">
+                                <a:solidFill>
+                                  <a:srgbClr val="1E3A5F"/>
+                                </a:solidFill>
+                                <a:latin typeface="Cambria Math" panose="02040503050406030204" pitchFamily="18" charset="0"/>
+                                <a:ea typeface="Arial" pitchFamily="34" charset="-122"/>
+                                <a:cs typeface="Arial" pitchFamily="34" charset="-120"/>
+                              </a:rPr>
+                              <m:t>h</m:t>
+                            </m:r>
+                            <m:r>
+                              <a:rPr lang="en-US" sz="1400" b="0" i="1" dirty="0" smtClean="0">
+                                <a:solidFill>
+                                  <a:srgbClr val="1E3A5F"/>
+                                </a:solidFill>
+                                <a:latin typeface="Cambria Math" panose="02040503050406030204" pitchFamily="18" charset="0"/>
+                                <a:ea typeface="Arial" pitchFamily="34" charset="-122"/>
+                                <a:cs typeface="Arial" pitchFamily="34" charset="-120"/>
+                              </a:rPr>
+                              <m:t>𝑒𝑡𝑎</m:t>
                             </m:r>
                             <m:r>
                               <a:rPr lang="en-US" sz="1400" b="0" i="1" dirty="0" smtClean="0">
@@ -15356,7 +15673,18 @@
                                 <a:ea typeface="Arial" pitchFamily="34" charset="-122"/>
                                 <a:cs typeface="Arial" pitchFamily="34" charset="-120"/>
                               </a:rPr>
-                              <m:t>1, </m:t>
+                              <m:t>1</m:t>
+                            </m:r>
+                            <m:r>
+                              <a:rPr lang="en-US" sz="1400" b="0" i="1" dirty="0" smtClean="0">
+                                <a:solidFill>
+                                  <a:srgbClr val="1E3A5F"/>
+                                </a:solidFill>
+                                <a:latin typeface="Cambria Math" panose="02040503050406030204" pitchFamily="18" charset="0"/>
+                                <a:ea typeface="Arial" pitchFamily="34" charset="-122"/>
+                                <a:cs typeface="Arial" pitchFamily="34" charset="-120"/>
+                              </a:rPr>
+                              <m:t>, </m:t>
                             </m:r>
                             <m:r>
                               <a:rPr lang="en-US" sz="1400" b="0" i="1" dirty="0" smtClean="0">
@@ -15378,7 +15706,18 @@
                                 <a:ea typeface="Arial" pitchFamily="34" charset="-122"/>
                                 <a:cs typeface="Arial" pitchFamily="34" charset="-120"/>
                               </a:rPr>
-                              <m:t>1, </m:t>
+                              <m:t>1</m:t>
+                            </m:r>
+                            <m:r>
+                              <a:rPr lang="en-US" sz="1400" b="0" i="1" dirty="0" smtClean="0">
+                                <a:solidFill>
+                                  <a:srgbClr val="1E3A5F"/>
+                                </a:solidFill>
+                                <a:latin typeface="Cambria Math" panose="02040503050406030204" pitchFamily="18" charset="0"/>
+                                <a:ea typeface="Arial" pitchFamily="34" charset="-122"/>
+                                <a:cs typeface="Arial" pitchFamily="34" charset="-120"/>
+                              </a:rPr>
+                              <m:t>, </m:t>
                             </m:r>
                             <m:r>
                               <a:rPr lang="en-US" sz="1400" b="0" i="1" dirty="0" smtClean="0">
@@ -15400,7 +15739,18 @@
                                 <a:ea typeface="Arial" pitchFamily="34" charset="-122"/>
                                 <a:cs typeface="Arial" pitchFamily="34" charset="-120"/>
                               </a:rPr>
-                              <m:t>2, </m:t>
+                              <m:t>2</m:t>
+                            </m:r>
+                            <m:r>
+                              <a:rPr lang="en-US" sz="1400" b="0" i="1" dirty="0" smtClean="0">
+                                <a:solidFill>
+                                  <a:srgbClr val="1E3A5F"/>
+                                </a:solidFill>
+                                <a:latin typeface="Cambria Math" panose="02040503050406030204" pitchFamily="18" charset="0"/>
+                                <a:ea typeface="Arial" pitchFamily="34" charset="-122"/>
+                                <a:cs typeface="Arial" pitchFamily="34" charset="-120"/>
+                              </a:rPr>
+                              <m:t>, </m:t>
                             </m:r>
                             <m:r>
                               <a:rPr lang="en-US" sz="1400" b="0" i="1" dirty="0" smtClean="0">
@@ -15422,7 +15772,18 @@
                                 <a:ea typeface="Arial" pitchFamily="34" charset="-122"/>
                                 <a:cs typeface="Arial" pitchFamily="34" charset="-120"/>
                               </a:rPr>
-                              <m:t>2, …, </m:t>
+                              <m:t>2</m:t>
+                            </m:r>
+                            <m:r>
+                              <a:rPr lang="en-US" sz="1400" b="0" i="1" dirty="0" smtClean="0">
+                                <a:solidFill>
+                                  <a:srgbClr val="1E3A5F"/>
+                                </a:solidFill>
+                                <a:latin typeface="Cambria Math" panose="02040503050406030204" pitchFamily="18" charset="0"/>
+                                <a:ea typeface="Arial" pitchFamily="34" charset="-122"/>
+                                <a:cs typeface="Arial" pitchFamily="34" charset="-120"/>
+                              </a:rPr>
+                              <m:t>, …, </m:t>
                             </m:r>
                             <m:r>
                               <a:rPr lang="en-US" sz="1400" b="0" i="1" dirty="0" smtClean="0">
@@ -15498,7 +15859,7 @@
             </p:txBody>
           </p:sp>
         </mc:Choice>
-        <mc:Fallback>
+        <mc:Fallback xmlns="">
           <p:sp>
             <p:nvSpPr>
               <p:cNvPr id="6" name="Text 4"/>
@@ -24601,8 +24962,8 @@
         </p:nvSpPr>
         <p:spPr>
           <a:xfrm>
-            <a:off x="274320" y="685800"/>
-            <a:ext cx="8595360" cy="822960"/>
+            <a:off x="274320" y="685799"/>
+            <a:ext cx="8595360" cy="1099109"/>
           </a:xfrm>
           <a:prstGeom prst="rect">
             <a:avLst/>
@@ -24649,7 +25010,7 @@
         <p:spPr>
           <a:xfrm>
             <a:off x="457200" y="758952"/>
-            <a:ext cx="8275320" cy="685800"/>
+            <a:ext cx="8275320" cy="1025956"/>
           </a:xfrm>
           <a:prstGeom prst="rect">
             <a:avLst/>
@@ -24684,7 +25045,71 @@
                 <a:ea typeface="Arial" pitchFamily="34" charset="-122"/>
                 <a:cs typeface="Arial" pitchFamily="34" charset="-120"/>
               </a:rPr>
-              <a:t>Hospital opens Floor 4. No map exists. Localization (MOD-06) needs a map. Planning (MOD-09) needs a map. To build a map, the robot needs to know where it IS. Neither is known! This is SLAM: solve BOTH simultaneously.</a:t>
+              <a:t>Hospital opens Floor 4. </a:t>
+            </a:r>
+          </a:p>
+          <a:p>
+            <a:pPr marL="0" indent="0">
+              <a:buNone/>
+            </a:pPr>
+            <a:r>
+              <a:rPr lang="en-US" sz="1200" dirty="0">
+                <a:solidFill>
+                  <a:srgbClr val="1F2937"/>
+                </a:solidFill>
+                <a:latin typeface="Arial" pitchFamily="34" charset="0"/>
+                <a:ea typeface="Arial" pitchFamily="34" charset="-122"/>
+                <a:cs typeface="Arial" pitchFamily="34" charset="-120"/>
+              </a:rPr>
+              <a:t>No map exists. </a:t>
+            </a:r>
+          </a:p>
+          <a:p>
+            <a:pPr marL="0" indent="0">
+              <a:buNone/>
+            </a:pPr>
+            <a:r>
+              <a:rPr lang="en-US" sz="1200" dirty="0">
+                <a:solidFill>
+                  <a:srgbClr val="1F2937"/>
+                </a:solidFill>
+                <a:latin typeface="Arial" pitchFamily="34" charset="0"/>
+                <a:ea typeface="Arial" pitchFamily="34" charset="-122"/>
+                <a:cs typeface="Arial" pitchFamily="34" charset="-120"/>
+              </a:rPr>
+              <a:t>Localization (MOD-06) needs a map. </a:t>
+            </a:r>
+          </a:p>
+          <a:p>
+            <a:pPr marL="0" indent="0">
+              <a:buNone/>
+            </a:pPr>
+            <a:r>
+              <a:rPr lang="en-US" sz="1200" dirty="0">
+                <a:solidFill>
+                  <a:srgbClr val="1F2937"/>
+                </a:solidFill>
+                <a:latin typeface="Arial" pitchFamily="34" charset="0"/>
+                <a:ea typeface="Arial" pitchFamily="34" charset="-122"/>
+                <a:cs typeface="Arial" pitchFamily="34" charset="-120"/>
+              </a:rPr>
+              <a:t>Planning (MOD-09) needs a map. </a:t>
+            </a:r>
+          </a:p>
+          <a:p>
+            <a:pPr marL="0" indent="0">
+              <a:buNone/>
+            </a:pPr>
+            <a:r>
+              <a:rPr lang="en-US" sz="1200" dirty="0">
+                <a:solidFill>
+                  <a:srgbClr val="1F2937"/>
+                </a:solidFill>
+                <a:latin typeface="Arial" pitchFamily="34" charset="0"/>
+                <a:ea typeface="Arial" pitchFamily="34" charset="-122"/>
+                <a:cs typeface="Arial" pitchFamily="34" charset="-120"/>
+              </a:rPr>
+              <a:t>To build a map, the robot needs to know where it IS. Neither is known! This is SLAM: solve BOTH simultaneously.</a:t>
             </a:r>
             <a:endParaRPr lang="en-US" sz="1200" dirty="0"/>
           </a:p>
@@ -24698,7 +25123,7 @@
         </p:nvSpPr>
         <p:spPr>
           <a:xfrm>
-            <a:off x="274320" y="1691640"/>
+            <a:off x="274320" y="1918465"/>
             <a:ext cx="4114800" cy="1371600"/>
           </a:xfrm>
           <a:prstGeom prst="rect">
@@ -24725,7 +25150,7 @@
         </p:nvSpPr>
         <p:spPr>
           <a:xfrm>
-            <a:off x="274320" y="1691640"/>
+            <a:off x="274320" y="1918465"/>
             <a:ext cx="54864" cy="1371600"/>
           </a:xfrm>
           <a:prstGeom prst="rect">
@@ -24745,7 +25170,7 @@
         </p:nvSpPr>
         <p:spPr>
           <a:xfrm>
-            <a:off x="438912" y="1746504"/>
+            <a:off x="438912" y="1973329"/>
             <a:ext cx="3840480" cy="274320"/>
           </a:xfrm>
           <a:prstGeom prst="rect">
@@ -24784,7 +25209,7 @@
         </p:nvSpPr>
         <p:spPr>
           <a:xfrm>
-            <a:off x="438912" y="2039112"/>
+            <a:off x="438912" y="2265937"/>
             <a:ext cx="3840480" cy="960120"/>
           </a:xfrm>
           <a:prstGeom prst="rect">
@@ -24878,7 +25303,7 @@
         </p:nvSpPr>
         <p:spPr>
           <a:xfrm>
-            <a:off x="4663440" y="1691640"/>
+            <a:off x="4663440" y="1918465"/>
             <a:ext cx="4206240" cy="1371600"/>
           </a:xfrm>
           <a:prstGeom prst="rect">
@@ -24905,7 +25330,7 @@
         </p:nvSpPr>
         <p:spPr>
           <a:xfrm>
-            <a:off x="4663440" y="1691640"/>
+            <a:off x="4663440" y="1918465"/>
             <a:ext cx="54864" cy="1371600"/>
           </a:xfrm>
           <a:prstGeom prst="rect">
@@ -24925,7 +25350,7 @@
         </p:nvSpPr>
         <p:spPr>
           <a:xfrm>
-            <a:off x="4828032" y="1746504"/>
+            <a:off x="4828032" y="1973329"/>
             <a:ext cx="3931920" cy="274320"/>
           </a:xfrm>
           <a:prstGeom prst="rect">
@@ -24964,7 +25389,7 @@
         </p:nvSpPr>
         <p:spPr>
           <a:xfrm>
-            <a:off x="4828032" y="2039112"/>
+            <a:off x="4828032" y="2265937"/>
             <a:ext cx="3931920" cy="960120"/>
           </a:xfrm>
           <a:prstGeom prst="rect">
@@ -25058,7 +25483,7 @@
         </p:nvSpPr>
         <p:spPr>
           <a:xfrm>
-            <a:off x="274320" y="3291840"/>
+            <a:off x="274320" y="3518665"/>
             <a:ext cx="8595360" cy="1244718"/>
           </a:xfrm>
           <a:prstGeom prst="rect">
@@ -25087,7 +25512,7 @@
             </p:nvSpPr>
             <p:spPr>
               <a:xfrm>
-                <a:off x="411480" y="3337560"/>
+                <a:off x="411480" y="3564385"/>
                 <a:ext cx="8321040" cy="307238"/>
               </a:xfrm>
               <a:prstGeom prst="rect">
@@ -25457,7 +25882,7 @@
             </p:nvSpPr>
             <p:spPr>
               <a:xfrm>
-                <a:off x="411480" y="3337560"/>
+                <a:off x="411480" y="3564385"/>
                 <a:ext cx="8321040" cy="307238"/>
               </a:xfrm>
               <a:prstGeom prst="rect">
@@ -25466,7 +25891,7 @@
               <a:blipFill>
                 <a:blip r:embed="rId3"/>
                 <a:stretch>
-                  <a:fillRect l="-220" t="-6000" b="-20000"/>
+                  <a:fillRect l="-220" t="-4000" b="-20000"/>
                 </a:stretch>
               </a:blipFill>
               <a:ln/>
@@ -25494,7 +25919,7 @@
         </p:nvSpPr>
         <p:spPr>
           <a:xfrm>
-            <a:off x="411480" y="3613709"/>
+            <a:off x="411480" y="3840534"/>
             <a:ext cx="8321040" cy="380390"/>
           </a:xfrm>
           <a:prstGeom prst="rect">
@@ -26750,8 +27175,8 @@
         </p:nvSpPr>
         <p:spPr>
           <a:xfrm>
-            <a:off x="365760" y="2560320"/>
-            <a:ext cx="8412480" cy="274320"/>
+            <a:off x="365760" y="2560319"/>
+            <a:ext cx="8412480" cy="693243"/>
           </a:xfrm>
           <a:prstGeom prst="rect">
             <a:avLst/>
@@ -26775,7 +27200,23 @@
                 <a:ea typeface="Arial" pitchFamily="34" charset="-122"/>
                 <a:cs typeface="Arial" pitchFamily="34" charset="-120"/>
               </a:rPr>
-              <a:t>Graph-SLAM dominates modern SLAM. Used by: slam_toolbox, Cartographer, ORB-SLAM, LIO-SAM.</a:t>
+              <a:t>Graph-SLAM dominates modern SLAM. </a:t>
+            </a:r>
+          </a:p>
+          <a:p>
+            <a:pPr marL="0" indent="0">
+              <a:buNone/>
+            </a:pPr>
+            <a:r>
+              <a:rPr lang="en-US" sz="1200" b="1" dirty="0">
+                <a:solidFill>
+                  <a:srgbClr val="1F2937"/>
+                </a:solidFill>
+                <a:latin typeface="Arial" pitchFamily="34" charset="0"/>
+                <a:ea typeface="Arial" pitchFamily="34" charset="-122"/>
+                <a:cs typeface="Arial" pitchFamily="34" charset="-120"/>
+              </a:rPr>
+              <a:t>Used by: slam_toolbox, Cartographer, ORB-SLAM, LIO-SAM.</a:t>
             </a:r>
             <a:endParaRPr lang="en-US" sz="1200" dirty="0"/>
           </a:p>
@@ -26920,8 +27361,8 @@
         </p:nvSpPr>
         <p:spPr>
           <a:xfrm>
-            <a:off x="365760" y="685800"/>
-            <a:ext cx="8412480" cy="274320"/>
+            <a:off x="365760" y="685799"/>
+            <a:ext cx="8412480" cy="594359"/>
           </a:xfrm>
           <a:prstGeom prst="rect">
             <a:avLst/>
@@ -26945,7 +27386,23 @@
                 <a:ea typeface="Arial" pitchFamily="34" charset="-122"/>
                 <a:cs typeface="Arial" pitchFamily="34" charset="-120"/>
               </a:rPr>
-              <a:t>Nodes = robot poses. Edges = constraints (odometry, loop closure, landmark observations).</a:t>
+              <a:t>Nodes = robot poses. </a:t>
+            </a:r>
+          </a:p>
+          <a:p>
+            <a:pPr marL="0" indent="0">
+              <a:buNone/>
+            </a:pPr>
+            <a:r>
+              <a:rPr lang="en-US" sz="1300" b="1" dirty="0">
+                <a:solidFill>
+                  <a:srgbClr val="1F2937"/>
+                </a:solidFill>
+                <a:latin typeface="Arial" pitchFamily="34" charset="0"/>
+                <a:ea typeface="Arial" pitchFamily="34" charset="-122"/>
+                <a:cs typeface="Arial" pitchFamily="34" charset="-120"/>
+              </a:rPr>
+              <a:t>Edges = constraints (odometry, loop closure, landmark observations).</a:t>
             </a:r>
             <a:endParaRPr lang="en-US" sz="1300" dirty="0"/>
           </a:p>
@@ -26959,7 +27416,7 @@
         </p:nvSpPr>
         <p:spPr>
           <a:xfrm>
-            <a:off x="274320" y="1051559"/>
+            <a:off x="274320" y="1767483"/>
             <a:ext cx="4114800" cy="1337221"/>
           </a:xfrm>
           <a:prstGeom prst="rect">
@@ -26986,7 +27443,7 @@
         </p:nvSpPr>
         <p:spPr>
           <a:xfrm>
-            <a:off x="274320" y="1051560"/>
+            <a:off x="274320" y="1767484"/>
             <a:ext cx="54864" cy="1097280"/>
           </a:xfrm>
           <a:prstGeom prst="rect">
@@ -27006,7 +27463,7 @@
         </p:nvSpPr>
         <p:spPr>
           <a:xfrm>
-            <a:off x="438912" y="1106424"/>
+            <a:off x="438912" y="1822348"/>
             <a:ext cx="3840480" cy="274320"/>
           </a:xfrm>
           <a:prstGeom prst="rect">
@@ -27047,7 +27504,7 @@
             </p:nvSpPr>
             <p:spPr>
               <a:xfrm>
-                <a:off x="438912" y="1399032"/>
+                <a:off x="438912" y="2114956"/>
                 <a:ext cx="3840480" cy="685800"/>
               </a:xfrm>
               <a:prstGeom prst="rect">
@@ -27140,7 +27597,18 @@
                                 <a:ea typeface="Arial" pitchFamily="34" charset="-122"/>
                                 <a:cs typeface="Arial" pitchFamily="34" charset="-120"/>
                               </a:rPr>
-                              <m:t>+1</m:t>
+                              <m:t>+</m:t>
+                            </m:r>
+                            <m:r>
+                              <a:rPr lang="en-US" sz="1200" i="1" dirty="0" smtClean="0">
+                                <a:solidFill>
+                                  <a:srgbClr val="6B7280"/>
+                                </a:solidFill>
+                                <a:latin typeface="Cambria Math" panose="02040503050406030204" pitchFamily="18" charset="0"/>
+                                <a:ea typeface="Arial" pitchFamily="34" charset="-122"/>
+                                <a:cs typeface="Arial" pitchFamily="34" charset="-120"/>
+                              </a:rPr>
+                              <m:t>1</m:t>
                             </m:r>
                           </m:e>
                         </m:d>
@@ -27483,7 +27951,7 @@
             </p:nvSpPr>
             <p:spPr>
               <a:xfrm>
-                <a:off x="438912" y="1399032"/>
+                <a:off x="438912" y="2114956"/>
                 <a:ext cx="3840480" cy="685800"/>
               </a:xfrm>
               <a:prstGeom prst="rect">
@@ -27492,7 +27960,7 @@
               <a:blipFill>
                 <a:blip r:embed="rId3"/>
                 <a:stretch>
-                  <a:fillRect t="-1786" b="-2679"/>
+                  <a:fillRect t="-1786" b="-3571"/>
                 </a:stretch>
               </a:blipFill>
               <a:ln/>
@@ -27520,7 +27988,7 @@
         </p:nvSpPr>
         <p:spPr>
           <a:xfrm>
-            <a:off x="4663440" y="1051560"/>
+            <a:off x="4663440" y="1767484"/>
             <a:ext cx="4206240" cy="1337220"/>
           </a:xfrm>
           <a:prstGeom prst="rect">
@@ -27547,7 +28015,7 @@
         </p:nvSpPr>
         <p:spPr>
           <a:xfrm>
-            <a:off x="4663440" y="1051560"/>
+            <a:off x="4663440" y="1767484"/>
             <a:ext cx="54864" cy="1097280"/>
           </a:xfrm>
           <a:prstGeom prst="rect">
@@ -27567,7 +28035,7 @@
         </p:nvSpPr>
         <p:spPr>
           <a:xfrm>
-            <a:off x="4828032" y="1106424"/>
+            <a:off x="4828032" y="1822348"/>
             <a:ext cx="3931920" cy="274320"/>
           </a:xfrm>
           <a:prstGeom prst="rect">
@@ -27608,7 +28076,7 @@
             </p:nvSpPr>
             <p:spPr>
               <a:xfrm>
-                <a:off x="4828032" y="1399032"/>
+                <a:off x="4828032" y="2114956"/>
                 <a:ext cx="3931920" cy="685800"/>
               </a:xfrm>
               <a:prstGeom prst="rect">
@@ -27757,7 +28225,7 @@
                       </m:e>
                       <m:sub>
                         <m:r>
-                          <a:rPr lang="en-US" sz="1200" i="1" dirty="0" smtClean="0">
+                          <a:rPr lang="en-US" sz="1200" b="0" i="1" dirty="0" smtClean="0">
                             <a:solidFill>
                               <a:srgbClr val="6B7280"/>
                             </a:solidFill>
@@ -27765,7 +28233,7 @@
                             <a:ea typeface="Arial" pitchFamily="34" charset="-122"/>
                             <a:cs typeface="Arial" pitchFamily="34" charset="-120"/>
                           </a:rPr>
-                          <m:t>𝑠𝑡𝑎𝑟𝑡</m:t>
+                          <m:t>𝑏𝑒𝑓𝑜𝑟𝑒</m:t>
                         </m:r>
                       </m:sub>
                     </m:sSub>
@@ -27823,7 +28291,7 @@
             </p:nvSpPr>
             <p:spPr>
               <a:xfrm>
-                <a:off x="4828032" y="1399032"/>
+                <a:off x="4828032" y="2114956"/>
                 <a:ext cx="3931920" cy="685800"/>
               </a:xfrm>
               <a:prstGeom prst="rect">
@@ -27832,7 +28300,7 @@
               <a:blipFill>
                 <a:blip r:embed="rId4"/>
                 <a:stretch>
-                  <a:fillRect t="-1786" b="-25893"/>
+                  <a:fillRect t="-1786" b="-28571"/>
                 </a:stretch>
               </a:blipFill>
               <a:ln/>
@@ -27860,7 +28328,7 @@
         </p:nvSpPr>
         <p:spPr>
           <a:xfrm>
-            <a:off x="320040" y="2606040"/>
+            <a:off x="320040" y="3321964"/>
             <a:ext cx="8412480" cy="274320"/>
           </a:xfrm>
           <a:prstGeom prst="rect">
@@ -28065,8 +28533,8 @@
           </a:effectLst>
         </p:spPr>
       </p:sp>
-      <mc:AlternateContent xmlns:mc="http://schemas.openxmlformats.org/markup-compatibility/2006">
-        <mc:Choice xmlns:a14="http://schemas.microsoft.com/office/drawing/2010/main" Requires="a14">
+      <mc:AlternateContent xmlns:mc="http://schemas.openxmlformats.org/markup-compatibility/2006" xmlns:a14="http://schemas.microsoft.com/office/drawing/2010/main">
+        <mc:Choice Requires="a14">
           <p:sp>
             <p:nvSpPr>
               <p:cNvPr id="6" name="Text 4"/>
@@ -28669,7 +29137,7 @@
             </p:txBody>
           </p:sp>
         </mc:Choice>
-        <mc:Fallback>
+        <mc:Fallback xmlns="">
           <p:sp>
             <p:nvSpPr>
               <p:cNvPr id="6" name="Text 4"/>
@@ -28792,8 +29260,8 @@
           </a:effectLst>
         </p:spPr>
       </p:sp>
-      <mc:AlternateContent xmlns:mc="http://schemas.openxmlformats.org/markup-compatibility/2006">
-        <mc:Choice xmlns:a14="http://schemas.microsoft.com/office/drawing/2010/main" Requires="a14">
+      <mc:AlternateContent xmlns:mc="http://schemas.openxmlformats.org/markup-compatibility/2006" xmlns:a14="http://schemas.microsoft.com/office/drawing/2010/main">
+        <mc:Choice Requires="a14">
           <p:sp>
             <p:nvSpPr>
               <p:cNvPr id="9" name="Text 7"/>
@@ -28975,7 +29443,18 @@
                             <a:ea typeface="Arial" pitchFamily="34" charset="-122"/>
                             <a:cs typeface="Arial" pitchFamily="34" charset="-120"/>
                           </a:rPr>
-                          <m:t>−1</m:t>
+                          <m:t>−</m:t>
+                        </m:r>
+                        <m:r>
+                          <a:rPr lang="en-US" sz="1400" b="0" i="1" dirty="0" smtClean="0">
+                            <a:solidFill>
+                              <a:srgbClr val="1E3A5F"/>
+                            </a:solidFill>
+                            <a:latin typeface="Cambria Math" panose="02040503050406030204" pitchFamily="18" charset="0"/>
+                            <a:ea typeface="Arial" pitchFamily="34" charset="-122"/>
+                            <a:cs typeface="Arial" pitchFamily="34" charset="-120"/>
+                          </a:rPr>
+                          <m:t>1</m:t>
                         </m:r>
                       </m:sup>
                     </m:sSup>
@@ -29103,7 +29582,7 @@
             </p:txBody>
           </p:sp>
         </mc:Choice>
-        <mc:Fallback>
+        <mc:Fallback xmlns="">
           <p:sp>
             <p:nvSpPr>
               <p:cNvPr id="9" name="Text 7"/>
@@ -38751,45 +39230,6 @@
           </a:p>
         </p:txBody>
       </p:sp>
-      <p:sp>
-        <p:nvSpPr>
-          <p:cNvPr id="13" name="Text 11"/>
-          <p:cNvSpPr/>
-          <p:nvPr/>
-        </p:nvSpPr>
-        <p:spPr>
-          <a:xfrm>
-            <a:off x="365760" y="2926080"/>
-            <a:ext cx="8412480" cy="274320"/>
-          </a:xfrm>
-          <a:prstGeom prst="rect">
-            <a:avLst/>
-          </a:prstGeom>
-          <a:noFill/>
-          <a:ln/>
-        </p:spPr>
-        <p:txBody>
-          <a:bodyPr wrap="square" rtlCol="0" anchor="ctr"/>
-          <a:lstStyle/>
-          <a:p>
-            <a:pPr marL="0" indent="0">
-              <a:buNone/>
-            </a:pPr>
-            <a:r>
-              <a:rPr lang="en-US" sz="1200" i="1" dirty="0">
-                <a:solidFill>
-                  <a:srgbClr val="6B7280"/>
-                </a:solidFill>
-                <a:latin typeface="Arial" pitchFamily="34" charset="0"/>
-                <a:ea typeface="Arial" pitchFamily="34" charset="-122"/>
-                <a:cs typeface="Arial" pitchFamily="34" charset="-120"/>
-              </a:rPr>
-              <a:t>Research frontier. Not yet practical for navigation, but likely within 5 years.</a:t>
-            </a:r>
-            <a:endParaRPr lang="en-US" sz="1200" dirty="0"/>
-          </a:p>
-        </p:txBody>
-      </p:sp>
     </p:spTree>
   </p:cSld>
   <p:clrMapOvr>
@@ -40010,7 +40450,7 @@
                 <a:ea typeface="Arial" pitchFamily="34" charset="-122"/>
                 <a:cs typeface="Arial" pitchFamily="34" charset="-120"/>
               </a:rPr>
-              <a:t>Occupancy Grid Mapping</a:t>
+              <a:t>Occupancy Grid Map building</a:t>
             </a:r>
             <a:endParaRPr lang="en-US" sz="2800" dirty="0"/>
           </a:p>
@@ -40064,7 +40504,7 @@
 </file>
 
 <file path=ppt/slides/slide50.xml><?xml version="1.0" encoding="utf-8"?>
-<p:sld xmlns:a="http://schemas.openxmlformats.org/drawingml/2006/main" xmlns:r="http://schemas.openxmlformats.org/officeDocument/2006/relationships" xmlns:p="http://schemas.openxmlformats.org/presentationml/2006/main" show="0">
+<p:sld xmlns:a="http://schemas.openxmlformats.org/drawingml/2006/main" xmlns:r="http://schemas.openxmlformats.org/officeDocument/2006/relationships" xmlns:p="http://schemas.openxmlformats.org/presentationml/2006/main">
   <p:cSld name="Slide 50">
     <p:bg>
       <p:bgPr>
@@ -40541,7 +40981,7 @@
         </p:nvSpPr>
         <p:spPr>
           <a:xfrm>
-            <a:off x="0" y="0"/>
+            <a:off x="0" y="-7088"/>
             <a:ext cx="9144000" cy="594360"/>
           </a:xfrm>
           <a:prstGeom prst="rect">
@@ -40586,7 +41026,7 @@
                 <a:ea typeface="Arial" pitchFamily="34" charset="-122"/>
                 <a:cs typeface="Arial" pitchFamily="34" charset="-120"/>
               </a:rPr>
-              <a:t>Log-Odds: Efficient Belief Update for Grid Cells</a:t>
+              <a:t>Log-odds: Efficient Belief Update for Grid Cells</a:t>
             </a:r>
             <a:endParaRPr lang="en-US" sz="1600" dirty="0"/>
           </a:p>
@@ -40658,8 +41098,8 @@
           </a:effectLst>
         </p:spPr>
       </p:sp>
-      <mc:AlternateContent xmlns:mc="http://schemas.openxmlformats.org/markup-compatibility/2006">
-        <mc:Choice xmlns:a14="http://schemas.microsoft.com/office/drawing/2010/main" Requires="a14">
+      <mc:AlternateContent xmlns:mc="http://schemas.openxmlformats.org/markup-compatibility/2006" xmlns:a14="http://schemas.microsoft.com/office/drawing/2010/main">
+        <mc:Choice Requires="a14">
           <p:sp>
             <p:nvSpPr>
               <p:cNvPr id="6" name="Text 4"/>
@@ -40855,7 +41295,18 @@
                                     <a:ea typeface="Arial" pitchFamily="34" charset="-122"/>
                                     <a:cs typeface="Arial" pitchFamily="34" charset="-120"/>
                                   </a:rPr>
-                                  <m:t>1−</m:t>
+                                  <m:t>1</m:t>
+                                </m:r>
+                                <m:r>
+                                  <a:rPr lang="en-US" sz="1400" b="0" i="1" dirty="0" smtClean="0">
+                                    <a:solidFill>
+                                      <a:srgbClr val="1E3A5F"/>
+                                    </a:solidFill>
+                                    <a:latin typeface="Cambria Math" panose="02040503050406030204" pitchFamily="18" charset="0"/>
+                                    <a:ea typeface="Arial" pitchFamily="34" charset="-122"/>
+                                    <a:cs typeface="Arial" pitchFamily="34" charset="-120"/>
+                                  </a:rPr>
+                                  <m:t>−</m:t>
                                 </m:r>
                                 <m:r>
                                   <a:rPr lang="en-US" sz="1400" b="0" i="1" dirty="0" smtClean="0">
@@ -41254,7 +41705,7 @@
             </p:txBody>
           </p:sp>
         </mc:Choice>
-        <mc:Fallback>
+        <mc:Fallback xmlns="">
           <p:sp>
             <p:nvSpPr>
               <p:cNvPr id="6" name="Text 4"/>
@@ -41294,8 +41745,8 @@
           </p:sp>
         </mc:Fallback>
       </mc:AlternateContent>
-      <mc:AlternateContent xmlns:mc="http://schemas.openxmlformats.org/markup-compatibility/2006">
-        <mc:Choice xmlns:a14="http://schemas.microsoft.com/office/drawing/2010/main" Requires="a14">
+      <mc:AlternateContent xmlns:mc="http://schemas.openxmlformats.org/markup-compatibility/2006" xmlns:a14="http://schemas.microsoft.com/office/drawing/2010/main">
+        <mc:Choice Requires="a14">
           <p:sp>
             <p:nvSpPr>
               <p:cNvPr id="7" name="Text 5"/>
@@ -41397,7 +41848,7 @@
             </p:txBody>
           </p:sp>
         </mc:Choice>
-        <mc:Fallback>
+        <mc:Fallback xmlns="">
           <p:sp>
             <p:nvSpPr>
               <p:cNvPr id="7" name="Text 5"/>
@@ -41523,8 +41974,8 @@
           </a:p>
         </p:txBody>
       </p:sp>
-      <mc:AlternateContent xmlns:mc="http://schemas.openxmlformats.org/markup-compatibility/2006">
-        <mc:Choice xmlns:a14="http://schemas.microsoft.com/office/drawing/2010/main" Requires="a14">
+      <mc:AlternateContent xmlns:mc="http://schemas.openxmlformats.org/markup-compatibility/2006" xmlns:a14="http://schemas.microsoft.com/office/drawing/2010/main">
+        <mc:Choice Requires="a14">
           <p:sp>
             <p:nvSpPr>
               <p:cNvPr id="11" name="Text 9"/>
@@ -41712,7 +42163,51 @@
                         <a:ea typeface="Arial" pitchFamily="34" charset="-122"/>
                         <a:cs typeface="Arial" pitchFamily="34" charset="-120"/>
                       </a:rPr>
-                      <m:t>~ +0.85 </m:t>
+                      <m:t>~ +</m:t>
+                    </m:r>
+                    <m:r>
+                      <a:rPr lang="en-US" sz="1200" i="1" dirty="0" smtClean="0">
+                        <a:solidFill>
+                          <a:srgbClr val="6B7280"/>
+                        </a:solidFill>
+                        <a:latin typeface="Cambria Math" panose="02040503050406030204" pitchFamily="18" charset="0"/>
+                        <a:ea typeface="Arial" pitchFamily="34" charset="-122"/>
+                        <a:cs typeface="Arial" pitchFamily="34" charset="-120"/>
+                      </a:rPr>
+                      <m:t>0</m:t>
+                    </m:r>
+                    <m:r>
+                      <a:rPr lang="en-US" sz="1200" i="1" dirty="0" smtClean="0">
+                        <a:solidFill>
+                          <a:srgbClr val="6B7280"/>
+                        </a:solidFill>
+                        <a:latin typeface="Cambria Math" panose="02040503050406030204" pitchFamily="18" charset="0"/>
+                        <a:ea typeface="Arial" pitchFamily="34" charset="-122"/>
+                        <a:cs typeface="Arial" pitchFamily="34" charset="-120"/>
+                      </a:rPr>
+                      <m:t>.</m:t>
+                    </m:r>
+                    <m:r>
+                      <a:rPr lang="en-US" sz="1200" i="1" dirty="0" smtClean="0">
+                        <a:solidFill>
+                          <a:srgbClr val="6B7280"/>
+                        </a:solidFill>
+                        <a:latin typeface="Cambria Math" panose="02040503050406030204" pitchFamily="18" charset="0"/>
+                        <a:ea typeface="Arial" pitchFamily="34" charset="-122"/>
+                        <a:cs typeface="Arial" pitchFamily="34" charset="-120"/>
+                      </a:rPr>
+                      <m:t>85</m:t>
+                    </m:r>
+                    <m:r>
+                      <a:rPr lang="en-US" sz="1200" i="1" dirty="0" smtClean="0">
+                        <a:solidFill>
+                          <a:srgbClr val="6B7280"/>
+                        </a:solidFill>
+                        <a:latin typeface="Cambria Math" panose="02040503050406030204" pitchFamily="18" charset="0"/>
+                        <a:ea typeface="Arial" pitchFamily="34" charset="-122"/>
+                        <a:cs typeface="Arial" pitchFamily="34" charset="-120"/>
+                      </a:rPr>
+                      <m:t> </m:t>
                     </m:r>
                   </m:oMath>
                 </a14:m>
@@ -41768,7 +42263,7 @@
             </p:txBody>
           </p:sp>
         </mc:Choice>
-        <mc:Fallback>
+        <mc:Fallback xmlns="">
           <p:sp>
             <p:nvSpPr>
               <p:cNvPr id="11" name="Text 9"/>
@@ -41894,8 +42389,8 @@
           </a:p>
         </p:txBody>
       </p:sp>
-      <mc:AlternateContent xmlns:mc="http://schemas.openxmlformats.org/markup-compatibility/2006">
-        <mc:Choice xmlns:a14="http://schemas.microsoft.com/office/drawing/2010/main" Requires="a14">
+      <mc:AlternateContent xmlns:mc="http://schemas.openxmlformats.org/markup-compatibility/2006" xmlns:a14="http://schemas.microsoft.com/office/drawing/2010/main">
+        <mc:Choice Requires="a14">
           <p:sp>
             <p:nvSpPr>
               <p:cNvPr id="15" name="Text 13"/>
@@ -42083,7 +42578,40 @@
                         <a:ea typeface="Arial" pitchFamily="34" charset="-122"/>
                         <a:cs typeface="Arial" pitchFamily="34" charset="-120"/>
                       </a:rPr>
-                      <m:t>~ −0.4</m:t>
+                      <m:t>~ −</m:t>
+                    </m:r>
+                    <m:r>
+                      <a:rPr lang="en-US" sz="1200" i="1" dirty="0" smtClean="0">
+                        <a:solidFill>
+                          <a:srgbClr val="6B7280"/>
+                        </a:solidFill>
+                        <a:latin typeface="Cambria Math" panose="02040503050406030204" pitchFamily="18" charset="0"/>
+                        <a:ea typeface="Arial" pitchFamily="34" charset="-122"/>
+                        <a:cs typeface="Arial" pitchFamily="34" charset="-120"/>
+                      </a:rPr>
+                      <m:t>0</m:t>
+                    </m:r>
+                    <m:r>
+                      <a:rPr lang="en-US" sz="1200" i="1" dirty="0" smtClean="0">
+                        <a:solidFill>
+                          <a:srgbClr val="6B7280"/>
+                        </a:solidFill>
+                        <a:latin typeface="Cambria Math" panose="02040503050406030204" pitchFamily="18" charset="0"/>
+                        <a:ea typeface="Arial" pitchFamily="34" charset="-122"/>
+                        <a:cs typeface="Arial" pitchFamily="34" charset="-120"/>
+                      </a:rPr>
+                      <m:t>.</m:t>
+                    </m:r>
+                    <m:r>
+                      <a:rPr lang="en-US" sz="1200" i="1" dirty="0" smtClean="0">
+                        <a:solidFill>
+                          <a:srgbClr val="6B7280"/>
+                        </a:solidFill>
+                        <a:latin typeface="Cambria Math" panose="02040503050406030204" pitchFamily="18" charset="0"/>
+                        <a:ea typeface="Arial" pitchFamily="34" charset="-122"/>
+                        <a:cs typeface="Arial" pitchFamily="34" charset="-120"/>
+                      </a:rPr>
+                      <m:t>4</m:t>
                     </m:r>
                   </m:oMath>
                 </a14:m>
@@ -42204,7 +42732,18 @@
                         <a:ea typeface="Arial" pitchFamily="34" charset="-122"/>
                         <a:cs typeface="Arial" pitchFamily="34" charset="-120"/>
                       </a:rPr>
-                      <m:t>~0</m:t>
+                      <m:t>~</m:t>
+                    </m:r>
+                    <m:r>
+                      <a:rPr lang="en-US" sz="1200" i="1" dirty="0" smtClean="0">
+                        <a:solidFill>
+                          <a:srgbClr val="6B7280"/>
+                        </a:solidFill>
+                        <a:latin typeface="Cambria Math" panose="02040503050406030204" pitchFamily="18" charset="0"/>
+                        <a:ea typeface="Arial" pitchFamily="34" charset="-122"/>
+                        <a:cs typeface="Arial" pitchFamily="34" charset="-120"/>
+                      </a:rPr>
+                      <m:t>0</m:t>
                     </m:r>
                   </m:oMath>
                 </a14:m>
@@ -42231,7 +42770,7 @@
             </p:txBody>
           </p:sp>
         </mc:Choice>
-        <mc:Fallback>
+        <mc:Fallback xmlns="">
           <p:sp>
             <p:nvSpPr>
               <p:cNvPr id="15" name="Text 13"/>
@@ -42271,8 +42810,8 @@
           </p:sp>
         </mc:Fallback>
       </mc:AlternateContent>
-      <mc:AlternateContent xmlns:mc="http://schemas.openxmlformats.org/markup-compatibility/2006">
-        <mc:Choice xmlns:a14="http://schemas.microsoft.com/office/drawing/2010/main" Requires="a14">
+      <mc:AlternateContent xmlns:mc="http://schemas.openxmlformats.org/markup-compatibility/2006" xmlns:a14="http://schemas.microsoft.com/office/drawing/2010/main">
+        <mc:Choice Requires="a14">
           <p:sp>
             <p:nvSpPr>
               <p:cNvPr id="16" name="Text 14"/>
@@ -42525,7 +43064,7 @@
             </p:txBody>
           </p:sp>
         </mc:Choice>
-        <mc:Fallback>
+        <mc:Fallback xmlns="">
           <p:sp>
             <p:nvSpPr>
               <p:cNvPr id="16" name="Text 14"/>
@@ -42776,7 +43315,7 @@
                 <a:ea typeface="Arial" pitchFamily="34" charset="-122"/>
                 <a:cs typeface="Arial" pitchFamily="34" charset="-120"/>
               </a:rPr>
-              <a:t>PBL SCENARIO: </a:t>
+              <a:t>SCENARIO: </a:t>
             </a:r>
             <a:r>
               <a:rPr lang="en-US" sz="1200" dirty="0">
